--- a/Planeamento/FEIM/ApresentacaoFeim_Proj41.pptx
+++ b/Planeamento/FEIM/ApresentacaoFeim_Proj41.pptx
@@ -5,7 +5,7 @@
     <p:sldMasterId id="2147483648" r:id="rId1"/>
   </p:sldMasterIdLst>
   <p:notesMasterIdLst>
-    <p:notesMasterId r:id="rId14"/>
+    <p:notesMasterId r:id="rId15"/>
   </p:notesMasterIdLst>
   <p:sldIdLst>
     <p:sldId id="256" r:id="rId2"/>
@@ -13,13 +13,14 @@
     <p:sldId id="262" r:id="rId4"/>
     <p:sldId id="276" r:id="rId5"/>
     <p:sldId id="266" r:id="rId6"/>
-    <p:sldId id="273" r:id="rId7"/>
-    <p:sldId id="264" r:id="rId8"/>
-    <p:sldId id="270" r:id="rId9"/>
-    <p:sldId id="271" r:id="rId10"/>
-    <p:sldId id="275" r:id="rId11"/>
-    <p:sldId id="265" r:id="rId12"/>
-    <p:sldId id="278" r:id="rId13"/>
+    <p:sldId id="279" r:id="rId7"/>
+    <p:sldId id="273" r:id="rId8"/>
+    <p:sldId id="264" r:id="rId9"/>
+    <p:sldId id="270" r:id="rId10"/>
+    <p:sldId id="271" r:id="rId11"/>
+    <p:sldId id="275" r:id="rId12"/>
+    <p:sldId id="265" r:id="rId13"/>
+    <p:sldId id="278" r:id="rId14"/>
   </p:sldIdLst>
   <p:sldSz cx="12192000" cy="6858000"/>
   <p:notesSz cx="6858000" cy="9144000"/>
@@ -2214,7 +2215,7 @@
           <a:p>
             <a:fld id="{CD8110C0-EB98-4588-8EFE-A709E78A5183}" type="datetimeFigureOut">
               <a:rPr lang="pt-PT" smtClean="0"/>
-              <a:t>16/05/2026</a:t>
+              <a:t>17/05/2026</a:t>
             </a:fld>
             <a:endParaRPr lang="pt-PT"/>
           </a:p>
@@ -2372,7 +2373,7 @@
           <a:p>
             <a:fld id="{5B399530-E1B9-43ED-9C25-0B773D1F8AB2}" type="slidenum">
               <a:rPr lang="pt-PT" smtClean="0"/>
-              <a:t>‹#›</a:t>
+              <a:t>‹nº›</a:t>
             </a:fld>
             <a:endParaRPr lang="pt-PT"/>
           </a:p>
@@ -2636,7 +2637,7 @@
           <a:p>
             <a:fld id="{5B399530-E1B9-43ED-9C25-0B773D1F8AB2}" type="slidenum">
               <a:rPr lang="pt-PT" smtClean="0"/>
-              <a:t>6</a:t>
+              <a:t>7</a:t>
             </a:fld>
             <a:endParaRPr lang="pt-PT"/>
           </a:p>
@@ -2723,7 +2724,7 @@
           <a:p>
             <a:fld id="{5B399530-E1B9-43ED-9C25-0B773D1F8AB2}" type="slidenum">
               <a:rPr lang="pt-PT" smtClean="0"/>
-              <a:t>7</a:t>
+              <a:t>8</a:t>
             </a:fld>
             <a:endParaRPr lang="pt-PT"/>
           </a:p>
@@ -2810,7 +2811,7 @@
           <a:p>
             <a:fld id="{5B399530-E1B9-43ED-9C25-0B773D1F8AB2}" type="slidenum">
               <a:rPr lang="pt-PT" smtClean="0"/>
-              <a:t>9</a:t>
+              <a:t>10</a:t>
             </a:fld>
             <a:endParaRPr lang="pt-PT"/>
           </a:p>
@@ -2897,7 +2898,7 @@
           <a:p>
             <a:fld id="{5B399530-E1B9-43ED-9C25-0B773D1F8AB2}" type="slidenum">
               <a:rPr lang="pt-PT" smtClean="0"/>
-              <a:t>11</a:t>
+              <a:t>12</a:t>
             </a:fld>
             <a:endParaRPr lang="pt-PT"/>
           </a:p>
@@ -3008,7 +3009,7 @@
           <a:p>
             <a:fld id="{5B399530-E1B9-43ED-9C25-0B773D1F8AB2}" type="slidenum">
               <a:rPr lang="pt-PT" smtClean="0"/>
-              <a:t>12</a:t>
+              <a:t>13</a:t>
             </a:fld>
             <a:endParaRPr lang="pt-PT"/>
           </a:p>
@@ -3174,7 +3175,7 @@
           <a:p>
             <a:fld id="{8E8E0223-04C6-4648-8B82-FE4EE95F9224}" type="datetime1">
               <a:rPr lang="pt-PT" smtClean="0"/>
-              <a:t>16/05/2026</a:t>
+              <a:t>17/05/2026</a:t>
             </a:fld>
             <a:endParaRPr lang="pt-PT"/>
           </a:p>
@@ -3228,7 +3229,7 @@
           <a:p>
             <a:fld id="{AEFA9852-3563-417D-95EE-A70EE092CCC6}" type="slidenum">
               <a:rPr lang="pt-PT" smtClean="0"/>
-              <a:t>‹#›</a:t>
+              <a:t>‹nº›</a:t>
             </a:fld>
             <a:endParaRPr lang="pt-PT"/>
           </a:p>
@@ -3372,7 +3373,7 @@
           <a:p>
             <a:fld id="{845EC784-ED01-4063-BDE1-4E24053A1C1C}" type="datetime1">
               <a:rPr lang="pt-PT" smtClean="0"/>
-              <a:t>16/05/2026</a:t>
+              <a:t>17/05/2026</a:t>
             </a:fld>
             <a:endParaRPr lang="pt-PT"/>
           </a:p>
@@ -3426,7 +3427,7 @@
           <a:p>
             <a:fld id="{AEFA9852-3563-417D-95EE-A70EE092CCC6}" type="slidenum">
               <a:rPr lang="pt-PT" smtClean="0"/>
-              <a:t>‹#›</a:t>
+              <a:t>‹nº›</a:t>
             </a:fld>
             <a:endParaRPr lang="pt-PT"/>
           </a:p>
@@ -3580,7 +3581,7 @@
           <a:p>
             <a:fld id="{86584153-2AC7-4951-8099-F118CEDEAA5F}" type="datetime1">
               <a:rPr lang="pt-PT" smtClean="0"/>
-              <a:t>16/05/2026</a:t>
+              <a:t>17/05/2026</a:t>
             </a:fld>
             <a:endParaRPr lang="pt-PT"/>
           </a:p>
@@ -3634,7 +3635,7 @@
           <a:p>
             <a:fld id="{AEFA9852-3563-417D-95EE-A70EE092CCC6}" type="slidenum">
               <a:rPr lang="pt-PT" smtClean="0"/>
-              <a:t>‹#›</a:t>
+              <a:t>‹nº›</a:t>
             </a:fld>
             <a:endParaRPr lang="pt-PT"/>
           </a:p>
@@ -3778,7 +3779,7 @@
           <a:p>
             <a:fld id="{BDA2DC7B-1B03-4F22-91F8-1A80F9095060}" type="datetime1">
               <a:rPr lang="pt-PT" smtClean="0"/>
-              <a:t>16/05/2026</a:t>
+              <a:t>17/05/2026</a:t>
             </a:fld>
             <a:endParaRPr lang="pt-PT"/>
           </a:p>
@@ -3832,7 +3833,7 @@
           <a:p>
             <a:fld id="{AEFA9852-3563-417D-95EE-A70EE092CCC6}" type="slidenum">
               <a:rPr lang="pt-PT" smtClean="0"/>
-              <a:t>‹#›</a:t>
+              <a:t>‹nº›</a:t>
             </a:fld>
             <a:endParaRPr lang="pt-PT"/>
           </a:p>
@@ -4053,7 +4054,7 @@
           <a:p>
             <a:fld id="{B8EE0D03-411F-4F03-869A-FCEABF2A3AC0}" type="datetime1">
               <a:rPr lang="pt-PT" smtClean="0"/>
-              <a:t>16/05/2026</a:t>
+              <a:t>17/05/2026</a:t>
             </a:fld>
             <a:endParaRPr lang="pt-PT"/>
           </a:p>
@@ -4107,7 +4108,7 @@
           <a:p>
             <a:fld id="{AEFA9852-3563-417D-95EE-A70EE092CCC6}" type="slidenum">
               <a:rPr lang="pt-PT" smtClean="0"/>
-              <a:t>‹#›</a:t>
+              <a:t>‹nº›</a:t>
             </a:fld>
             <a:endParaRPr lang="pt-PT"/>
           </a:p>
@@ -4318,7 +4319,7 @@
           <a:p>
             <a:fld id="{ED18A796-2B3B-4154-956B-7E2BFEF113B7}" type="datetime1">
               <a:rPr lang="pt-PT" smtClean="0"/>
-              <a:t>16/05/2026</a:t>
+              <a:t>17/05/2026</a:t>
             </a:fld>
             <a:endParaRPr lang="pt-PT"/>
           </a:p>
@@ -4372,7 +4373,7 @@
           <a:p>
             <a:fld id="{AEFA9852-3563-417D-95EE-A70EE092CCC6}" type="slidenum">
               <a:rPr lang="pt-PT" smtClean="0"/>
-              <a:t>‹#›</a:t>
+              <a:t>‹nº›</a:t>
             </a:fld>
             <a:endParaRPr lang="pt-PT"/>
           </a:p>
@@ -4730,7 +4731,7 @@
           <a:p>
             <a:fld id="{7F200233-2A1B-437C-B2C5-35E264EC28E0}" type="datetime1">
               <a:rPr lang="pt-PT" smtClean="0"/>
-              <a:t>16/05/2026</a:t>
+              <a:t>17/05/2026</a:t>
             </a:fld>
             <a:endParaRPr lang="pt-PT"/>
           </a:p>
@@ -4784,7 +4785,7 @@
           <a:p>
             <a:fld id="{AEFA9852-3563-417D-95EE-A70EE092CCC6}" type="slidenum">
               <a:rPr lang="pt-PT" smtClean="0"/>
-              <a:t>‹#›</a:t>
+              <a:t>‹nº›</a:t>
             </a:fld>
             <a:endParaRPr lang="pt-PT"/>
           </a:p>
@@ -4871,7 +4872,7 @@
           <a:p>
             <a:fld id="{F6B062B5-0399-4741-86BA-330F5704A086}" type="datetime1">
               <a:rPr lang="pt-PT" smtClean="0"/>
-              <a:t>16/05/2026</a:t>
+              <a:t>17/05/2026</a:t>
             </a:fld>
             <a:endParaRPr lang="pt-PT"/>
           </a:p>
@@ -4925,7 +4926,7 @@
           <a:p>
             <a:fld id="{AEFA9852-3563-417D-95EE-A70EE092CCC6}" type="slidenum">
               <a:rPr lang="pt-PT" smtClean="0"/>
-              <a:t>‹#›</a:t>
+              <a:t>‹nº›</a:t>
             </a:fld>
             <a:endParaRPr lang="pt-PT"/>
           </a:p>
@@ -4984,7 +4985,7 @@
           <a:p>
             <a:fld id="{D71423D6-9A34-4A5B-8B65-58A87EE02A6D}" type="datetime1">
               <a:rPr lang="pt-PT" smtClean="0"/>
-              <a:t>16/05/2026</a:t>
+              <a:t>17/05/2026</a:t>
             </a:fld>
             <a:endParaRPr lang="pt-PT"/>
           </a:p>
@@ -5043,7 +5044,7 @@
           <a:p>
             <a:fld id="{AEFA9852-3563-417D-95EE-A70EE092CCC6}" type="slidenum">
               <a:rPr lang="pt-PT" smtClean="0"/>
-              <a:t>‹#›</a:t>
+              <a:t>‹nº›</a:t>
             </a:fld>
             <a:endParaRPr lang="pt-PT" dirty="0"/>
           </a:p>
@@ -5300,7 +5301,7 @@
           <a:p>
             <a:fld id="{31EEBAD0-E15E-4B85-8A8D-82CFF1BA7D0C}" type="datetime1">
               <a:rPr lang="pt-PT" smtClean="0"/>
-              <a:t>16/05/2026</a:t>
+              <a:t>17/05/2026</a:t>
             </a:fld>
             <a:endParaRPr lang="pt-PT"/>
           </a:p>
@@ -5354,7 +5355,7 @@
           <a:p>
             <a:fld id="{AEFA9852-3563-417D-95EE-A70EE092CCC6}" type="slidenum">
               <a:rPr lang="pt-PT" smtClean="0"/>
-              <a:t>‹#›</a:t>
+              <a:t>‹nº›</a:t>
             </a:fld>
             <a:endParaRPr lang="pt-PT"/>
           </a:p>
@@ -5588,7 +5589,7 @@
           <a:p>
             <a:fld id="{F08C3F5D-7EC5-4392-AA79-EFE9C6FDF896}" type="datetime1">
               <a:rPr lang="pt-PT" smtClean="0"/>
-              <a:t>16/05/2026</a:t>
+              <a:t>17/05/2026</a:t>
             </a:fld>
             <a:endParaRPr lang="pt-PT"/>
           </a:p>
@@ -5642,7 +5643,7 @@
           <a:p>
             <a:fld id="{AEFA9852-3563-417D-95EE-A70EE092CCC6}" type="slidenum">
               <a:rPr lang="pt-PT" smtClean="0"/>
-              <a:t>‹#›</a:t>
+              <a:t>‹nº›</a:t>
             </a:fld>
             <a:endParaRPr lang="pt-PT"/>
           </a:p>
@@ -5829,7 +5830,7 @@
           <a:p>
             <a:fld id="{64E2C288-1AC9-4286-A8B1-2D4D43DD2C61}" type="datetime1">
               <a:rPr lang="pt-PT" smtClean="0"/>
-              <a:t>16/05/2026</a:t>
+              <a:t>17/05/2026</a:t>
             </a:fld>
             <a:endParaRPr lang="pt-PT"/>
           </a:p>
@@ -5919,7 +5920,7 @@
           <a:p>
             <a:fld id="{AEFA9852-3563-417D-95EE-A70EE092CCC6}" type="slidenum">
               <a:rPr lang="pt-PT" smtClean="0"/>
-              <a:t>‹#›</a:t>
+              <a:t>‹nº›</a:t>
             </a:fld>
             <a:endParaRPr lang="pt-PT"/>
           </a:p>
@@ -6400,7 +6401,7 @@
         <p:spPr>
           <a:xfrm>
             <a:off x="769273" y="2535750"/>
-            <a:ext cx="3034602" cy="369332"/>
+            <a:ext cx="3034602" cy="615553"/>
           </a:xfrm>
           <a:prstGeom prst="rect">
             <a:avLst/>
@@ -6414,32 +6415,27 @@
           <a:lstStyle/>
           <a:p>
             <a:r>
-              <a:rPr lang="pt-PT" sz="1600" b="1" i="1" dirty="0">
-                <a:solidFill>
-                  <a:srgbClr val="FFFF00"/>
-                </a:solidFill>
-                <a:latin typeface="Arial" panose="020B0604020202020204" pitchFamily="34" charset="0"/>
-                <a:cs typeface="Arial" panose="020B0604020202020204" pitchFamily="34" charset="0"/>
-              </a:rPr>
-              <a:t> </a:t>
-            </a:r>
-            <a:r>
-              <a:rPr lang="pt-PT" b="1" u="sng" dirty="0">
+              <a:rPr lang="pt-PT" b="1" dirty="0">
                 <a:solidFill>
                   <a:srgbClr val="FFFF00"/>
                 </a:solidFill>
                 <a:latin typeface="Aptos" panose="020B0004020202020204" pitchFamily="34" charset="0"/>
                 <a:cs typeface="Arial" panose="020B0604020202020204" pitchFamily="34" charset="0"/>
               </a:rPr>
-              <a:t>Projeto nº41 </a:t>
+              <a:t>Projeto 2025/26</a:t>
             </a:r>
-            <a:endParaRPr lang="pt-PT" sz="1600" b="1" u="sng" dirty="0">
-              <a:solidFill>
-                <a:srgbClr val="FFFF00"/>
-              </a:solidFill>
-              <a:latin typeface="Aptos" panose="020B0004020202020204" pitchFamily="34" charset="0"/>
-              <a:cs typeface="Arial" panose="020B0604020202020204" pitchFamily="34" charset="0"/>
-            </a:endParaRPr>
+          </a:p>
+          <a:p>
+            <a:r>
+              <a:rPr lang="pt-PT" sz="1600" b="1" dirty="0">
+                <a:solidFill>
+                  <a:srgbClr val="FFFF00"/>
+                </a:solidFill>
+                <a:latin typeface="Aptos" panose="020B0004020202020204" pitchFamily="34" charset="0"/>
+                <a:cs typeface="Arial" panose="020B0604020202020204" pitchFamily="34" charset="0"/>
+              </a:rPr>
+              <a:t>Departamento de Informática</a:t>
+            </a:r>
           </a:p>
         </p:txBody>
       </p:sp>
@@ -7081,6 +7077,47 @@
           </a:extLst>
         </p:spPr>
       </p:pic>
+      <p:sp>
+        <p:nvSpPr>
+          <p:cNvPr id="5" name="CaixaDeTexto 4">
+            <a:extLst>
+              <a:ext uri="{FF2B5EF4-FFF2-40B4-BE49-F238E27FC236}">
+                <a16:creationId xmlns:a16="http://schemas.microsoft.com/office/drawing/2014/main" id="{94C62F06-BAF8-D7E0-E867-2A42ADF6B2A8}"/>
+              </a:ext>
+            </a:extLst>
+          </p:cNvPr>
+          <p:cNvSpPr txBox="1"/>
+          <p:nvPr/>
+        </p:nvSpPr>
+        <p:spPr>
+          <a:xfrm>
+            <a:off x="472271" y="6551288"/>
+            <a:ext cx="1176951" cy="307777"/>
+          </a:xfrm>
+          <a:prstGeom prst="rect">
+            <a:avLst/>
+          </a:prstGeom>
+          <a:noFill/>
+        </p:spPr>
+        <p:txBody>
+          <a:bodyPr wrap="square" rtlCol="0">
+            <a:spAutoFit/>
+          </a:bodyPr>
+          <a:lstStyle/>
+          <a:p>
+            <a:r>
+              <a:rPr lang="pt-PT" sz="1400" dirty="0">
+                <a:solidFill>
+                  <a:schemeClr val="bg1">
+                    <a:lumMod val="85000"/>
+                  </a:schemeClr>
+                </a:solidFill>
+              </a:rPr>
+              <a:t>PRJ#41</a:t>
+            </a:r>
+          </a:p>
+        </p:txBody>
+      </p:sp>
     </p:spTree>
     <p:extLst>
       <p:ext uri="{BB962C8B-B14F-4D97-AF65-F5344CB8AC3E}">
@@ -7095,6 +7132,557 @@
 </file>
 
 <file path=ppt/slides/slide10.xml><?xml version="1.0" encoding="utf-8"?>
+<p:sld xmlns:a="http://schemas.openxmlformats.org/drawingml/2006/main" xmlns:r="http://schemas.openxmlformats.org/officeDocument/2006/relationships" xmlns:p="http://schemas.openxmlformats.org/presentationml/2006/main">
+  <p:cSld>
+    <p:bg>
+      <p:bgPr>
+        <a:solidFill>
+          <a:srgbClr val="3D353F"/>
+        </a:solidFill>
+        <a:effectLst/>
+      </p:bgPr>
+    </p:bg>
+    <p:spTree>
+      <p:nvGrpSpPr>
+        <p:cNvPr id="1" name="">
+          <a:extLst>
+            <a:ext uri="{FF2B5EF4-FFF2-40B4-BE49-F238E27FC236}">
+              <a16:creationId xmlns:a16="http://schemas.microsoft.com/office/drawing/2014/main" id="{B7216570-ACC7-3D94-FCFB-19C36E2A468D}"/>
+            </a:ext>
+          </a:extLst>
+        </p:cNvPr>
+        <p:cNvGrpSpPr/>
+        <p:nvPr/>
+      </p:nvGrpSpPr>
+      <p:grpSpPr>
+        <a:xfrm>
+          <a:off x="0" y="0"/>
+          <a:ext cx="0" cy="0"/>
+          <a:chOff x="0" y="0"/>
+          <a:chExt cx="0" cy="0"/>
+        </a:xfrm>
+      </p:grpSpPr>
+      <p:sp>
+        <p:nvSpPr>
+          <p:cNvPr id="10" name="Marcador de Posição de Conteúdo 2">
+            <a:extLst>
+              <a:ext uri="{FF2B5EF4-FFF2-40B4-BE49-F238E27FC236}">
+                <a16:creationId xmlns:a16="http://schemas.microsoft.com/office/drawing/2014/main" id="{00245E8A-6563-A31F-4920-D66F3794D4B1}"/>
+              </a:ext>
+            </a:extLst>
+          </p:cNvPr>
+          <p:cNvSpPr txBox="1">
+            <a:spLocks/>
+          </p:cNvSpPr>
+          <p:nvPr/>
+        </p:nvSpPr>
+        <p:spPr>
+          <a:xfrm>
+            <a:off x="838200" y="1825625"/>
+            <a:ext cx="10515600" cy="4351338"/>
+          </a:xfrm>
+          <a:prstGeom prst="rect">
+            <a:avLst/>
+          </a:prstGeom>
+        </p:spPr>
+        <p:txBody>
+          <a:bodyPr/>
+          <a:lstStyle>
+            <a:lvl1pPr marL="228600" indent="-228600" algn="l" defTabSz="914400" rtl="0" eaLnBrk="1" latinLnBrk="0" hangingPunct="1">
+              <a:lnSpc>
+                <a:spcPct val="90000"/>
+              </a:lnSpc>
+              <a:spcBef>
+                <a:spcPts val="1000"/>
+              </a:spcBef>
+              <a:buFont typeface="Arial" panose="020B0604020202020204" pitchFamily="34" charset="0"/>
+              <a:buChar char="•"/>
+              <a:defRPr sz="2800" kern="1200">
+                <a:solidFill>
+                  <a:schemeClr val="tx1"/>
+                </a:solidFill>
+                <a:latin typeface="+mn-lt"/>
+                <a:ea typeface="+mn-ea"/>
+                <a:cs typeface="+mn-cs"/>
+              </a:defRPr>
+            </a:lvl1pPr>
+            <a:lvl2pPr marL="685800" indent="-228600" algn="l" defTabSz="914400" rtl="0" eaLnBrk="1" latinLnBrk="0" hangingPunct="1">
+              <a:lnSpc>
+                <a:spcPct val="90000"/>
+              </a:lnSpc>
+              <a:spcBef>
+                <a:spcPts val="500"/>
+              </a:spcBef>
+              <a:buFont typeface="Arial" panose="020B0604020202020204" pitchFamily="34" charset="0"/>
+              <a:buChar char="•"/>
+              <a:defRPr sz="2400" kern="1200">
+                <a:solidFill>
+                  <a:schemeClr val="tx1"/>
+                </a:solidFill>
+                <a:latin typeface="+mn-lt"/>
+                <a:ea typeface="+mn-ea"/>
+                <a:cs typeface="+mn-cs"/>
+              </a:defRPr>
+            </a:lvl2pPr>
+            <a:lvl3pPr marL="1143000" indent="-228600" algn="l" defTabSz="914400" rtl="0" eaLnBrk="1" latinLnBrk="0" hangingPunct="1">
+              <a:lnSpc>
+                <a:spcPct val="90000"/>
+              </a:lnSpc>
+              <a:spcBef>
+                <a:spcPts val="500"/>
+              </a:spcBef>
+              <a:buFont typeface="Arial" panose="020B0604020202020204" pitchFamily="34" charset="0"/>
+              <a:buChar char="•"/>
+              <a:defRPr sz="2000" kern="1200">
+                <a:solidFill>
+                  <a:schemeClr val="tx1"/>
+                </a:solidFill>
+                <a:latin typeface="+mn-lt"/>
+                <a:ea typeface="+mn-ea"/>
+                <a:cs typeface="+mn-cs"/>
+              </a:defRPr>
+            </a:lvl3pPr>
+            <a:lvl4pPr marL="1600200" indent="-228600" algn="l" defTabSz="914400" rtl="0" eaLnBrk="1" latinLnBrk="0" hangingPunct="1">
+              <a:lnSpc>
+                <a:spcPct val="90000"/>
+              </a:lnSpc>
+              <a:spcBef>
+                <a:spcPts val="500"/>
+              </a:spcBef>
+              <a:buFont typeface="Arial" panose="020B0604020202020204" pitchFamily="34" charset="0"/>
+              <a:buChar char="•"/>
+              <a:defRPr sz="1800" kern="1200">
+                <a:solidFill>
+                  <a:schemeClr val="tx1"/>
+                </a:solidFill>
+                <a:latin typeface="+mn-lt"/>
+                <a:ea typeface="+mn-ea"/>
+                <a:cs typeface="+mn-cs"/>
+              </a:defRPr>
+            </a:lvl4pPr>
+            <a:lvl5pPr marL="2057400" indent="-228600" algn="l" defTabSz="914400" rtl="0" eaLnBrk="1" latinLnBrk="0" hangingPunct="1">
+              <a:lnSpc>
+                <a:spcPct val="90000"/>
+              </a:lnSpc>
+              <a:spcBef>
+                <a:spcPts val="500"/>
+              </a:spcBef>
+              <a:buFont typeface="Arial" panose="020B0604020202020204" pitchFamily="34" charset="0"/>
+              <a:buChar char="•"/>
+              <a:defRPr sz="1800" kern="1200">
+                <a:solidFill>
+                  <a:schemeClr val="tx1"/>
+                </a:solidFill>
+                <a:latin typeface="+mn-lt"/>
+                <a:ea typeface="+mn-ea"/>
+                <a:cs typeface="+mn-cs"/>
+              </a:defRPr>
+            </a:lvl5pPr>
+            <a:lvl6pPr marL="2514600" indent="-228600" algn="l" defTabSz="914400" rtl="0" eaLnBrk="1" latinLnBrk="0" hangingPunct="1">
+              <a:lnSpc>
+                <a:spcPct val="90000"/>
+              </a:lnSpc>
+              <a:spcBef>
+                <a:spcPts val="500"/>
+              </a:spcBef>
+              <a:buFont typeface="Arial" panose="020B0604020202020204" pitchFamily="34" charset="0"/>
+              <a:buChar char="•"/>
+              <a:defRPr sz="1800" kern="1200">
+                <a:solidFill>
+                  <a:schemeClr val="tx1"/>
+                </a:solidFill>
+                <a:latin typeface="+mn-lt"/>
+                <a:ea typeface="+mn-ea"/>
+                <a:cs typeface="+mn-cs"/>
+              </a:defRPr>
+            </a:lvl6pPr>
+            <a:lvl7pPr marL="2971800" indent="-228600" algn="l" defTabSz="914400" rtl="0" eaLnBrk="1" latinLnBrk="0" hangingPunct="1">
+              <a:lnSpc>
+                <a:spcPct val="90000"/>
+              </a:lnSpc>
+              <a:spcBef>
+                <a:spcPts val="500"/>
+              </a:spcBef>
+              <a:buFont typeface="Arial" panose="020B0604020202020204" pitchFamily="34" charset="0"/>
+              <a:buChar char="•"/>
+              <a:defRPr sz="1800" kern="1200">
+                <a:solidFill>
+                  <a:schemeClr val="tx1"/>
+                </a:solidFill>
+                <a:latin typeface="+mn-lt"/>
+                <a:ea typeface="+mn-ea"/>
+                <a:cs typeface="+mn-cs"/>
+              </a:defRPr>
+            </a:lvl7pPr>
+            <a:lvl8pPr marL="3429000" indent="-228600" algn="l" defTabSz="914400" rtl="0" eaLnBrk="1" latinLnBrk="0" hangingPunct="1">
+              <a:lnSpc>
+                <a:spcPct val="90000"/>
+              </a:lnSpc>
+              <a:spcBef>
+                <a:spcPts val="500"/>
+              </a:spcBef>
+              <a:buFont typeface="Arial" panose="020B0604020202020204" pitchFamily="34" charset="0"/>
+              <a:buChar char="•"/>
+              <a:defRPr sz="1800" kern="1200">
+                <a:solidFill>
+                  <a:schemeClr val="tx1"/>
+                </a:solidFill>
+                <a:latin typeface="+mn-lt"/>
+                <a:ea typeface="+mn-ea"/>
+                <a:cs typeface="+mn-cs"/>
+              </a:defRPr>
+            </a:lvl8pPr>
+            <a:lvl9pPr marL="3886200" indent="-228600" algn="l" defTabSz="914400" rtl="0" eaLnBrk="1" latinLnBrk="0" hangingPunct="1">
+              <a:lnSpc>
+                <a:spcPct val="90000"/>
+              </a:lnSpc>
+              <a:spcBef>
+                <a:spcPts val="500"/>
+              </a:spcBef>
+              <a:buFont typeface="Arial" panose="020B0604020202020204" pitchFamily="34" charset="0"/>
+              <a:buChar char="•"/>
+              <a:defRPr sz="1800" kern="1200">
+                <a:solidFill>
+                  <a:schemeClr val="tx1"/>
+                </a:solidFill>
+                <a:latin typeface="+mn-lt"/>
+                <a:ea typeface="+mn-ea"/>
+                <a:cs typeface="+mn-cs"/>
+              </a:defRPr>
+            </a:lvl9pPr>
+          </a:lstStyle>
+          <a:p>
+            <a:pPr marL="0" indent="0">
+              <a:buNone/>
+            </a:pPr>
+            <a:endParaRPr lang="pt-PT" dirty="0">
+              <a:solidFill>
+                <a:schemeClr val="bg1"/>
+              </a:solidFill>
+            </a:endParaRPr>
+          </a:p>
+        </p:txBody>
+      </p:sp>
+      <p:sp>
+        <p:nvSpPr>
+          <p:cNvPr id="11" name="Título 1">
+            <a:extLst>
+              <a:ext uri="{FF2B5EF4-FFF2-40B4-BE49-F238E27FC236}">
+                <a16:creationId xmlns:a16="http://schemas.microsoft.com/office/drawing/2014/main" id="{5B2B5E58-7758-F935-07AC-17DF9A32F291}"/>
+              </a:ext>
+            </a:extLst>
+          </p:cNvPr>
+          <p:cNvSpPr txBox="1">
+            <a:spLocks/>
+          </p:cNvSpPr>
+          <p:nvPr/>
+        </p:nvSpPr>
+        <p:spPr>
+          <a:xfrm>
+            <a:off x="838200" y="365125"/>
+            <a:ext cx="10515600" cy="1325563"/>
+          </a:xfrm>
+          <a:prstGeom prst="rect">
+            <a:avLst/>
+          </a:prstGeom>
+        </p:spPr>
+        <p:txBody>
+          <a:bodyPr>
+            <a:normAutofit/>
+          </a:bodyPr>
+          <a:lstStyle>
+            <a:lvl1pPr algn="l" defTabSz="914400" rtl="0" eaLnBrk="1" latinLnBrk="0" hangingPunct="1">
+              <a:lnSpc>
+                <a:spcPct val="90000"/>
+              </a:lnSpc>
+              <a:spcBef>
+                <a:spcPct val="0"/>
+              </a:spcBef>
+              <a:buNone/>
+              <a:defRPr sz="4400" kern="1200">
+                <a:solidFill>
+                  <a:schemeClr val="tx1"/>
+                </a:solidFill>
+                <a:latin typeface="+mj-lt"/>
+                <a:ea typeface="+mj-ea"/>
+                <a:cs typeface="+mj-cs"/>
+              </a:defRPr>
+            </a:lvl1pPr>
+          </a:lstStyle>
+          <a:p>
+            <a:endParaRPr lang="pt-PT" b="1" dirty="0">
+              <a:solidFill>
+                <a:schemeClr val="bg1"/>
+              </a:solidFill>
+            </a:endParaRPr>
+          </a:p>
+        </p:txBody>
+      </p:sp>
+      <p:sp>
+        <p:nvSpPr>
+          <p:cNvPr id="3" name="Título 1">
+            <a:extLst>
+              <a:ext uri="{FF2B5EF4-FFF2-40B4-BE49-F238E27FC236}">
+                <a16:creationId xmlns:a16="http://schemas.microsoft.com/office/drawing/2014/main" id="{4B09E4AD-F3BE-4CCD-5D80-9E26321808C8}"/>
+              </a:ext>
+            </a:extLst>
+          </p:cNvPr>
+          <p:cNvSpPr txBox="1">
+            <a:spLocks/>
+          </p:cNvSpPr>
+          <p:nvPr/>
+        </p:nvSpPr>
+        <p:spPr>
+          <a:xfrm>
+            <a:off x="2763203" y="676852"/>
+            <a:ext cx="6781046" cy="709306"/>
+          </a:xfrm>
+          <a:prstGeom prst="rect">
+            <a:avLst/>
+          </a:prstGeom>
+        </p:spPr>
+        <p:txBody>
+          <a:bodyPr/>
+          <a:lstStyle>
+            <a:lvl1pPr algn="l" defTabSz="914400" rtl="0" eaLnBrk="1" latinLnBrk="0" hangingPunct="1">
+              <a:lnSpc>
+                <a:spcPct val="90000"/>
+              </a:lnSpc>
+              <a:spcBef>
+                <a:spcPct val="0"/>
+              </a:spcBef>
+              <a:buNone/>
+              <a:defRPr sz="4400" kern="1200">
+                <a:solidFill>
+                  <a:schemeClr val="tx1"/>
+                </a:solidFill>
+                <a:latin typeface="+mj-lt"/>
+                <a:ea typeface="+mj-ea"/>
+                <a:cs typeface="+mj-cs"/>
+              </a:defRPr>
+            </a:lvl1pPr>
+          </a:lstStyle>
+          <a:p>
+            <a:pPr algn="ctr"/>
+            <a:r>
+              <a:rPr lang="pt-PT" b="1" dirty="0">
+                <a:solidFill>
+                  <a:schemeClr val="bg1"/>
+                </a:solidFill>
+              </a:rPr>
+              <a:t>Caso de utilização principal</a:t>
+            </a:r>
+          </a:p>
+        </p:txBody>
+      </p:sp>
+      <p:sp>
+        <p:nvSpPr>
+          <p:cNvPr id="9" name="CaixaDeTexto 8">
+            <a:extLst>
+              <a:ext uri="{FF2B5EF4-FFF2-40B4-BE49-F238E27FC236}">
+                <a16:creationId xmlns:a16="http://schemas.microsoft.com/office/drawing/2014/main" id="{4F2E88C9-1D24-9A91-04D4-82390956B637}"/>
+              </a:ext>
+            </a:extLst>
+          </p:cNvPr>
+          <p:cNvSpPr txBox="1"/>
+          <p:nvPr/>
+        </p:nvSpPr>
+        <p:spPr>
+          <a:xfrm>
+            <a:off x="3065155" y="6523945"/>
+            <a:ext cx="6061689" cy="276999"/>
+          </a:xfrm>
+          <a:prstGeom prst="rect">
+            <a:avLst/>
+          </a:prstGeom>
+          <a:noFill/>
+        </p:spPr>
+        <p:txBody>
+          <a:bodyPr wrap="square" rtlCol="0">
+            <a:spAutoFit/>
+          </a:bodyPr>
+          <a:lstStyle/>
+          <a:p>
+            <a:pPr algn="ctr"/>
+            <a:r>
+              <a:rPr lang="pt-PT" sz="1200" dirty="0">
+                <a:solidFill>
+                  <a:schemeClr val="bg1"/>
+                </a:solidFill>
+              </a:rPr>
+              <a:t>Licenciatura em Engenharia Informática e Multimédia</a:t>
+            </a:r>
+          </a:p>
+        </p:txBody>
+      </p:sp>
+      <p:pic>
+        <p:nvPicPr>
+          <p:cNvPr id="12" name="Picture 2" descr="Serviço de Comunicação e Imagem | Instituto Superior de Engenharia de Lisboa">
+            <a:extLst>
+              <a:ext uri="{FF2B5EF4-FFF2-40B4-BE49-F238E27FC236}">
+                <a16:creationId xmlns:a16="http://schemas.microsoft.com/office/drawing/2014/main" id="{E45B079B-1E64-39A4-517B-20AA744B3F31}"/>
+              </a:ext>
+            </a:extLst>
+          </p:cNvPr>
+          <p:cNvPicPr>
+            <a:picLocks noChangeAspect="1" noChangeArrowheads="1"/>
+          </p:cNvPicPr>
+          <p:nvPr/>
+        </p:nvPicPr>
+        <p:blipFill>
+          <a:blip r:embed="rId3">
+            <a:duotone>
+              <a:schemeClr val="accent4">
+                <a:shade val="45000"/>
+                <a:satMod val="135000"/>
+              </a:schemeClr>
+              <a:prstClr val="white"/>
+            </a:duotone>
+            <a:extLst>
+              <a:ext uri="{BEBA8EAE-BF5A-486C-A8C5-ECC9F3942E4B}">
+                <a14:imgProps xmlns:a14="http://schemas.microsoft.com/office/drawing/2010/main">
+                  <a14:imgLayer r:embed="rId4">
+                    <a14:imgEffect>
+                      <a14:colorTemperature colorTemp="5212"/>
+                    </a14:imgEffect>
+                    <a14:imgEffect>
+                      <a14:saturation sat="153000"/>
+                    </a14:imgEffect>
+                  </a14:imgLayer>
+                </a14:imgProps>
+              </a:ext>
+              <a:ext uri="{28A0092B-C50C-407E-A947-70E740481C1C}">
+                <a14:useLocalDpi xmlns:a14="http://schemas.microsoft.com/office/drawing/2010/main" val="0"/>
+              </a:ext>
+            </a:extLst>
+          </a:blip>
+          <a:srcRect/>
+          <a:stretch>
+            <a:fillRect/>
+          </a:stretch>
+        </p:blipFill>
+        <p:spPr bwMode="auto">
+          <a:xfrm>
+            <a:off x="8892438" y="5663355"/>
+            <a:ext cx="3634141" cy="1370847"/>
+          </a:xfrm>
+          <a:prstGeom prst="rect">
+            <a:avLst/>
+          </a:prstGeom>
+          <a:noFill/>
+          <a:extLst>
+            <a:ext uri="{909E8E84-426E-40DD-AFC4-6F175D3DCCD1}">
+              <a14:hiddenFill xmlns:a14="http://schemas.microsoft.com/office/drawing/2010/main">
+                <a:solidFill>
+                  <a:srgbClr val="FFFFFF"/>
+                </a:solidFill>
+              </a14:hiddenFill>
+            </a:ext>
+          </a:extLst>
+        </p:spPr>
+      </p:pic>
+      <p:sp>
+        <p:nvSpPr>
+          <p:cNvPr id="4" name="Marcador de Posição do Número do Diapositivo 4">
+            <a:extLst>
+              <a:ext uri="{FF2B5EF4-FFF2-40B4-BE49-F238E27FC236}">
+                <a16:creationId xmlns:a16="http://schemas.microsoft.com/office/drawing/2014/main" id="{14E0DA14-B4AB-73CF-9AB5-B207054E0F54}"/>
+              </a:ext>
+            </a:extLst>
+          </p:cNvPr>
+          <p:cNvSpPr>
+            <a:spLocks noGrp="1"/>
+          </p:cNvSpPr>
+          <p:nvPr>
+            <p:ph type="sldNum" sz="quarter" idx="12"/>
+          </p:nvPr>
+        </p:nvSpPr>
+        <p:spPr>
+          <a:xfrm>
+            <a:off x="567554" y="6341382"/>
+            <a:ext cx="423046" cy="365125"/>
+          </a:xfrm>
+        </p:spPr>
+        <p:txBody>
+          <a:bodyPr/>
+          <a:lstStyle/>
+          <a:p>
+            <a:fld id="{AEFA9852-3563-417D-95EE-A70EE092CCC6}" type="slidenum">
+              <a:rPr lang="pt-PT" sz="1600" b="1" smtClean="0">
+                <a:solidFill>
+                  <a:schemeClr val="bg1"/>
+                </a:solidFill>
+              </a:rPr>
+              <a:t>10</a:t>
+            </a:fld>
+            <a:endParaRPr lang="pt-PT" b="1" dirty="0">
+              <a:solidFill>
+                <a:schemeClr val="bg1"/>
+              </a:solidFill>
+            </a:endParaRPr>
+          </a:p>
+        </p:txBody>
+      </p:sp>
+      <p:pic>
+        <p:nvPicPr>
+          <p:cNvPr id="8" name="Imagem 7">
+            <a:extLst>
+              <a:ext uri="{FF2B5EF4-FFF2-40B4-BE49-F238E27FC236}">
+                <a16:creationId xmlns:a16="http://schemas.microsoft.com/office/drawing/2014/main" id="{9851AD86-8766-F467-660C-39FDEA521374}"/>
+              </a:ext>
+            </a:extLst>
+          </p:cNvPr>
+          <p:cNvPicPr>
+            <a:picLocks noChangeAspect="1"/>
+          </p:cNvPicPr>
+          <p:nvPr/>
+        </p:nvPicPr>
+        <p:blipFill>
+          <a:blip r:embed="rId5">
+            <a:extLst>
+              <a:ext uri="{28A0092B-C50C-407E-A947-70E740481C1C}">
+                <a14:useLocalDpi xmlns:a14="http://schemas.microsoft.com/office/drawing/2010/main" val="0"/>
+              </a:ext>
+            </a:extLst>
+          </a:blip>
+          <a:stretch>
+            <a:fillRect/>
+          </a:stretch>
+        </p:blipFill>
+        <p:spPr>
+          <a:xfrm>
+            <a:off x="572655" y="2135414"/>
+            <a:ext cx="11167008" cy="2601460"/>
+          </a:xfrm>
+          <a:prstGeom prst="rect">
+            <a:avLst/>
+          </a:prstGeom>
+          <a:ln>
+            <a:noFill/>
+          </a:ln>
+          <a:effectLst>
+            <a:outerShdw blurRad="190500" algn="tl" rotWithShape="0">
+              <a:srgbClr val="000000">
+                <a:alpha val="70000"/>
+              </a:srgbClr>
+            </a:outerShdw>
+          </a:effectLst>
+        </p:spPr>
+      </p:pic>
+    </p:spTree>
+    <p:extLst>
+      <p:ext uri="{BB962C8B-B14F-4D97-AF65-F5344CB8AC3E}">
+        <p14:creationId xmlns:p14="http://schemas.microsoft.com/office/powerpoint/2010/main" val="3120748460"/>
+      </p:ext>
+    </p:extLst>
+  </p:cSld>
+  <p:clrMapOvr>
+    <a:masterClrMapping/>
+  </p:clrMapOvr>
+</p:sld>
+</file>
+
+<file path=ppt/slides/slide11.xml><?xml version="1.0" encoding="utf-8"?>
 <p:sld xmlns:a="http://schemas.openxmlformats.org/drawingml/2006/main" xmlns:r="http://schemas.openxmlformats.org/officeDocument/2006/relationships" xmlns:p="http://schemas.openxmlformats.org/presentationml/2006/main">
   <p:cSld>
     <p:bg>
@@ -7576,7 +8164,7 @@
                   <a:schemeClr val="bg1"/>
                 </a:solidFill>
               </a:rPr>
-              <a:t>10</a:t>
+              <a:t>11</a:t>
             </a:fld>
             <a:endParaRPr lang="pt-PT" b="1" dirty="0">
               <a:solidFill>
@@ -7645,7 +8233,7 @@
 </p:sld>
 </file>
 
-<file path=ppt/slides/slide11.xml><?xml version="1.0" encoding="utf-8"?>
+<file path=ppt/slides/slide12.xml><?xml version="1.0" encoding="utf-8"?>
 <p:sld xmlns:a="http://schemas.openxmlformats.org/drawingml/2006/main" xmlns:r="http://schemas.openxmlformats.org/officeDocument/2006/relationships" xmlns:p="http://schemas.openxmlformats.org/presentationml/2006/main">
   <p:cSld>
     <p:bg>
@@ -8162,7 +8750,7 @@
                   <a:schemeClr val="bg1"/>
                 </a:solidFill>
               </a:rPr>
-              <a:t>11</a:t>
+              <a:t>12</a:t>
             </a:fld>
             <a:endParaRPr lang="pt-PT" b="1" dirty="0">
               <a:solidFill>
@@ -8231,7 +8819,7 @@
 </p:sld>
 </file>
 
-<file path=ppt/slides/slide12.xml><?xml version="1.0" encoding="utf-8"?>
+<file path=ppt/slides/slide13.xml><?xml version="1.0" encoding="utf-8"?>
 <p:sld xmlns:a="http://schemas.openxmlformats.org/drawingml/2006/main" xmlns:r="http://schemas.openxmlformats.org/officeDocument/2006/relationships" xmlns:p="http://schemas.openxmlformats.org/presentationml/2006/main">
   <p:cSld>
     <p:bg>
@@ -8565,14 +9153,14 @@
           <a:p>
             <a:pPr algn="ctr"/>
             <a:r>
-              <a:rPr lang="pt-PT" b="1">
+              <a:rPr lang="pt-PT" b="1" dirty="0">
                 <a:solidFill>
                   <a:schemeClr val="bg1"/>
                 </a:solidFill>
               </a:rPr>
               <a:t>Demonstração</a:t>
             </a:r>
-            <a:endParaRPr lang="pt-PT"/>
+            <a:endParaRPr lang="pt-PT" dirty="0"/>
           </a:p>
         </p:txBody>
       </p:sp>
@@ -8714,7 +9302,7 @@
                   <a:schemeClr val="bg1"/>
                 </a:solidFill>
               </a:rPr>
-              <a:t>12</a:t>
+              <a:t>13</a:t>
             </a:fld>
             <a:endParaRPr lang="pt-PT" b="1" dirty="0">
               <a:solidFill>
@@ -8754,8 +9342,8 @@
         </p:blipFill>
         <p:spPr>
           <a:xfrm>
-            <a:off x="1591129" y="1086757"/>
-            <a:ext cx="9000672" cy="4847772"/>
+            <a:off x="-206406" y="0"/>
+            <a:ext cx="12732985" cy="6858000"/>
           </a:xfrm>
           <a:prstGeom prst="rect">
             <a:avLst/>
@@ -8800,7 +9388,7 @@
                                   <p:childTnLst>
                                     <p:cmd type="call" cmd="playFrom(0.0)">
                                       <p:cBhvr>
-                                        <p:cTn id="6" dur="1" fill="hold"/>
+                                        <p:cTn id="6" dur="14484" fill="hold"/>
                                         <p:tgtEl>
                                           <p:spTgt spid="6"/>
                                         </p:tgtEl>
@@ -9274,7 +9862,47 @@
                   <a:schemeClr val="bg1"/>
                 </a:solidFill>
               </a:rPr>
-              <a:t>.</a:t>
+              <a:t>, tal como </a:t>
+            </a:r>
+            <a:r>
+              <a:rPr lang="pt-PT" b="1" dirty="0">
+                <a:solidFill>
+                  <a:schemeClr val="bg1"/>
+                </a:solidFill>
+              </a:rPr>
+              <a:t>facilitar a customização de </a:t>
+            </a:r>
+            <a:r>
+              <a:rPr lang="pt-PT" b="1" dirty="0" err="1">
+                <a:solidFill>
+                  <a:schemeClr val="bg1"/>
+                </a:solidFill>
+              </a:rPr>
+              <a:t>templates</a:t>
+            </a:r>
+            <a:r>
+              <a:rPr lang="pt-PT" dirty="0">
+                <a:solidFill>
+                  <a:schemeClr val="bg1"/>
+                </a:solidFill>
+              </a:rPr>
+              <a:t> e </a:t>
+            </a:r>
+            <a:r>
+              <a:rPr lang="pt-PT" b="1" dirty="0">
+                <a:solidFill>
+                  <a:schemeClr val="bg1"/>
+                </a:solidFill>
+              </a:rPr>
+              <a:t>fornecer os certificados</a:t>
+            </a:r>
+            <a:r>
+              <a:rPr lang="pt-PT" dirty="0">
+                <a:solidFill>
+                  <a:schemeClr val="bg1"/>
+                </a:solidFill>
+              </a:rPr>
+              <a:t> aos alunos.</a:t>
             </a:r>
           </a:p>
         </p:txBody>
@@ -10574,14 +11202,14 @@
           <p:nvPr>
             <p:extLst>
               <p:ext uri="{D42A27DB-BD31-4B8C-83A1-F6EECF244321}">
-                <p14:modId xmlns:p14="http://schemas.microsoft.com/office/powerpoint/2010/main" val="433652964"/>
+                <p14:modId xmlns:p14="http://schemas.microsoft.com/office/powerpoint/2010/main" val="2810188154"/>
               </p:ext>
             </p:extLst>
           </p:nvPr>
         </p:nvGraphicFramePr>
         <p:xfrm>
           <a:off x="2271154" y="1020947"/>
-          <a:ext cx="7652977" cy="4823515"/>
+          <a:ext cx="7652977" cy="4879789"/>
         </p:xfrm>
         <a:graphic>
           <a:graphicData uri="http://schemas.openxmlformats.org/drawingml/2006/table">
@@ -10820,12 +11448,8 @@
                     <a:p>
                       <a:pPr algn="ctr"/>
                       <a:r>
-                        <a:rPr lang="pt-PT"/>
-                        <a:t>Editores Drag &amp; Drop </a:t>
-                      </a:r>
-                      <a:r>
                         <a:rPr lang="pt-PT" dirty="0"/>
-                        <a:t>limitados</a:t>
+                        <a:t>Editores com personalização limitada ou com grande curva de aprendizagem</a:t>
                       </a:r>
                     </a:p>
                   </a:txBody>
@@ -10898,11 +11522,11 @@
                       </a:pPr>
                       <a:r>
                         <a:rPr lang="pt-PT" dirty="0"/>
-                        <a:t>Integrado no sistema da </a:t>
+                        <a:t>Integrado no sistema da instituição como </a:t>
                       </a:r>
                       <a:r>
-                        <a:rPr lang="pt-PT"/>
-                        <a:t>instituição como WebApp</a:t>
+                        <a:rPr lang="pt-PT" dirty="0" err="1"/>
+                        <a:t>WebApp</a:t>
                       </a:r>
                       <a:endParaRPr lang="pt-PT" dirty="0"/>
                     </a:p>
@@ -13571,7 +14195,7 @@
         <p:cNvPr id="1" name="">
           <a:extLst>
             <a:ext uri="{FF2B5EF4-FFF2-40B4-BE49-F238E27FC236}">
-              <a16:creationId xmlns:a16="http://schemas.microsoft.com/office/drawing/2014/main" id="{97CE3E7C-A20D-F8BB-742D-038FF5FD1B39}"/>
+              <a16:creationId xmlns:a16="http://schemas.microsoft.com/office/drawing/2014/main" id="{7EA02FF6-11AC-56D5-027F-37E12BD3984D}"/>
             </a:ext>
           </a:extLst>
         </p:cNvPr>
@@ -13588,10 +14212,211 @@
       </p:grpSpPr>
       <p:sp>
         <p:nvSpPr>
+          <p:cNvPr id="10" name="Marcador de Posição de Conteúdo 2">
+            <a:extLst>
+              <a:ext uri="{FF2B5EF4-FFF2-40B4-BE49-F238E27FC236}">
+                <a16:creationId xmlns:a16="http://schemas.microsoft.com/office/drawing/2014/main" id="{94864149-370C-C6DA-7839-1F0EB0D9EBAC}"/>
+              </a:ext>
+            </a:extLst>
+          </p:cNvPr>
+          <p:cNvSpPr txBox="1">
+            <a:spLocks/>
+          </p:cNvSpPr>
+          <p:nvPr/>
+        </p:nvSpPr>
+        <p:spPr>
+          <a:xfrm>
+            <a:off x="838200" y="1825625"/>
+            <a:ext cx="10515600" cy="4351338"/>
+          </a:xfrm>
+          <a:prstGeom prst="rect">
+            <a:avLst/>
+          </a:prstGeom>
+        </p:spPr>
+        <p:txBody>
+          <a:bodyPr/>
+          <a:lstStyle>
+            <a:lvl1pPr marL="228600" indent="-228600" algn="l" defTabSz="914400" rtl="0" eaLnBrk="1" latinLnBrk="0" hangingPunct="1">
+              <a:lnSpc>
+                <a:spcPct val="90000"/>
+              </a:lnSpc>
+              <a:spcBef>
+                <a:spcPts val="1000"/>
+              </a:spcBef>
+              <a:buFont typeface="Arial" panose="020B0604020202020204" pitchFamily="34" charset="0"/>
+              <a:buChar char="•"/>
+              <a:defRPr sz="2800" kern="1200">
+                <a:solidFill>
+                  <a:schemeClr val="tx1"/>
+                </a:solidFill>
+                <a:latin typeface="+mn-lt"/>
+                <a:ea typeface="+mn-ea"/>
+                <a:cs typeface="+mn-cs"/>
+              </a:defRPr>
+            </a:lvl1pPr>
+            <a:lvl2pPr marL="685800" indent="-228600" algn="l" defTabSz="914400" rtl="0" eaLnBrk="1" latinLnBrk="0" hangingPunct="1">
+              <a:lnSpc>
+                <a:spcPct val="90000"/>
+              </a:lnSpc>
+              <a:spcBef>
+                <a:spcPts val="500"/>
+              </a:spcBef>
+              <a:buFont typeface="Arial" panose="020B0604020202020204" pitchFamily="34" charset="0"/>
+              <a:buChar char="•"/>
+              <a:defRPr sz="2400" kern="1200">
+                <a:solidFill>
+                  <a:schemeClr val="tx1"/>
+                </a:solidFill>
+                <a:latin typeface="+mn-lt"/>
+                <a:ea typeface="+mn-ea"/>
+                <a:cs typeface="+mn-cs"/>
+              </a:defRPr>
+            </a:lvl2pPr>
+            <a:lvl3pPr marL="1143000" indent="-228600" algn="l" defTabSz="914400" rtl="0" eaLnBrk="1" latinLnBrk="0" hangingPunct="1">
+              <a:lnSpc>
+                <a:spcPct val="90000"/>
+              </a:lnSpc>
+              <a:spcBef>
+                <a:spcPts val="500"/>
+              </a:spcBef>
+              <a:buFont typeface="Arial" panose="020B0604020202020204" pitchFamily="34" charset="0"/>
+              <a:buChar char="•"/>
+              <a:defRPr sz="2000" kern="1200">
+                <a:solidFill>
+                  <a:schemeClr val="tx1"/>
+                </a:solidFill>
+                <a:latin typeface="+mn-lt"/>
+                <a:ea typeface="+mn-ea"/>
+                <a:cs typeface="+mn-cs"/>
+              </a:defRPr>
+            </a:lvl3pPr>
+            <a:lvl4pPr marL="1600200" indent="-228600" algn="l" defTabSz="914400" rtl="0" eaLnBrk="1" latinLnBrk="0" hangingPunct="1">
+              <a:lnSpc>
+                <a:spcPct val="90000"/>
+              </a:lnSpc>
+              <a:spcBef>
+                <a:spcPts val="500"/>
+              </a:spcBef>
+              <a:buFont typeface="Arial" panose="020B0604020202020204" pitchFamily="34" charset="0"/>
+              <a:buChar char="•"/>
+              <a:defRPr sz="1800" kern="1200">
+                <a:solidFill>
+                  <a:schemeClr val="tx1"/>
+                </a:solidFill>
+                <a:latin typeface="+mn-lt"/>
+                <a:ea typeface="+mn-ea"/>
+                <a:cs typeface="+mn-cs"/>
+              </a:defRPr>
+            </a:lvl4pPr>
+            <a:lvl5pPr marL="2057400" indent="-228600" algn="l" defTabSz="914400" rtl="0" eaLnBrk="1" latinLnBrk="0" hangingPunct="1">
+              <a:lnSpc>
+                <a:spcPct val="90000"/>
+              </a:lnSpc>
+              <a:spcBef>
+                <a:spcPts val="500"/>
+              </a:spcBef>
+              <a:buFont typeface="Arial" panose="020B0604020202020204" pitchFamily="34" charset="0"/>
+              <a:buChar char="•"/>
+              <a:defRPr sz="1800" kern="1200">
+                <a:solidFill>
+                  <a:schemeClr val="tx1"/>
+                </a:solidFill>
+                <a:latin typeface="+mn-lt"/>
+                <a:ea typeface="+mn-ea"/>
+                <a:cs typeface="+mn-cs"/>
+              </a:defRPr>
+            </a:lvl5pPr>
+            <a:lvl6pPr marL="2514600" indent="-228600" algn="l" defTabSz="914400" rtl="0" eaLnBrk="1" latinLnBrk="0" hangingPunct="1">
+              <a:lnSpc>
+                <a:spcPct val="90000"/>
+              </a:lnSpc>
+              <a:spcBef>
+                <a:spcPts val="500"/>
+              </a:spcBef>
+              <a:buFont typeface="Arial" panose="020B0604020202020204" pitchFamily="34" charset="0"/>
+              <a:buChar char="•"/>
+              <a:defRPr sz="1800" kern="1200">
+                <a:solidFill>
+                  <a:schemeClr val="tx1"/>
+                </a:solidFill>
+                <a:latin typeface="+mn-lt"/>
+                <a:ea typeface="+mn-ea"/>
+                <a:cs typeface="+mn-cs"/>
+              </a:defRPr>
+            </a:lvl6pPr>
+            <a:lvl7pPr marL="2971800" indent="-228600" algn="l" defTabSz="914400" rtl="0" eaLnBrk="1" latinLnBrk="0" hangingPunct="1">
+              <a:lnSpc>
+                <a:spcPct val="90000"/>
+              </a:lnSpc>
+              <a:spcBef>
+                <a:spcPts val="500"/>
+              </a:spcBef>
+              <a:buFont typeface="Arial" panose="020B0604020202020204" pitchFamily="34" charset="0"/>
+              <a:buChar char="•"/>
+              <a:defRPr sz="1800" kern="1200">
+                <a:solidFill>
+                  <a:schemeClr val="tx1"/>
+                </a:solidFill>
+                <a:latin typeface="+mn-lt"/>
+                <a:ea typeface="+mn-ea"/>
+                <a:cs typeface="+mn-cs"/>
+              </a:defRPr>
+            </a:lvl7pPr>
+            <a:lvl8pPr marL="3429000" indent="-228600" algn="l" defTabSz="914400" rtl="0" eaLnBrk="1" latinLnBrk="0" hangingPunct="1">
+              <a:lnSpc>
+                <a:spcPct val="90000"/>
+              </a:lnSpc>
+              <a:spcBef>
+                <a:spcPts val="500"/>
+              </a:spcBef>
+              <a:buFont typeface="Arial" panose="020B0604020202020204" pitchFamily="34" charset="0"/>
+              <a:buChar char="•"/>
+              <a:defRPr sz="1800" kern="1200">
+                <a:solidFill>
+                  <a:schemeClr val="tx1"/>
+                </a:solidFill>
+                <a:latin typeface="+mn-lt"/>
+                <a:ea typeface="+mn-ea"/>
+                <a:cs typeface="+mn-cs"/>
+              </a:defRPr>
+            </a:lvl8pPr>
+            <a:lvl9pPr marL="3886200" indent="-228600" algn="l" defTabSz="914400" rtl="0" eaLnBrk="1" latinLnBrk="0" hangingPunct="1">
+              <a:lnSpc>
+                <a:spcPct val="90000"/>
+              </a:lnSpc>
+              <a:spcBef>
+                <a:spcPts val="500"/>
+              </a:spcBef>
+              <a:buFont typeface="Arial" panose="020B0604020202020204" pitchFamily="34" charset="0"/>
+              <a:buChar char="•"/>
+              <a:defRPr sz="1800" kern="1200">
+                <a:solidFill>
+                  <a:schemeClr val="tx1"/>
+                </a:solidFill>
+                <a:latin typeface="+mn-lt"/>
+                <a:ea typeface="+mn-ea"/>
+                <a:cs typeface="+mn-cs"/>
+              </a:defRPr>
+            </a:lvl9pPr>
+          </a:lstStyle>
+          <a:p>
+            <a:pPr marL="0" indent="0">
+              <a:buNone/>
+            </a:pPr>
+            <a:endParaRPr lang="pt-PT" dirty="0">
+              <a:solidFill>
+                <a:schemeClr val="bg1"/>
+              </a:solidFill>
+            </a:endParaRPr>
+          </a:p>
+        </p:txBody>
+      </p:sp>
+      <p:sp>
+        <p:nvSpPr>
           <p:cNvPr id="11" name="Título 1">
             <a:extLst>
               <a:ext uri="{FF2B5EF4-FFF2-40B4-BE49-F238E27FC236}">
-                <a16:creationId xmlns:a16="http://schemas.microsoft.com/office/drawing/2014/main" id="{07097AC6-4523-E09B-C4AC-23528FF0EAA8}"/>
+                <a16:creationId xmlns:a16="http://schemas.microsoft.com/office/drawing/2014/main" id="{9F1A75DB-914A-0965-5544-573C6BB96582}"/>
               </a:ext>
             </a:extLst>
           </p:cNvPr>
@@ -13646,6 +14471,339 @@
           <p:cNvPr id="3" name="Título 1">
             <a:extLst>
               <a:ext uri="{FF2B5EF4-FFF2-40B4-BE49-F238E27FC236}">
+                <a16:creationId xmlns:a16="http://schemas.microsoft.com/office/drawing/2014/main" id="{A2C1554D-CAA3-D0D3-3582-1F80781CAF1F}"/>
+              </a:ext>
+            </a:extLst>
+          </p:cNvPr>
+          <p:cNvSpPr txBox="1">
+            <a:spLocks/>
+          </p:cNvSpPr>
+          <p:nvPr/>
+        </p:nvSpPr>
+        <p:spPr>
+          <a:xfrm>
+            <a:off x="3363738" y="365125"/>
+            <a:ext cx="5464521" cy="686586"/>
+          </a:xfrm>
+          <a:prstGeom prst="rect">
+            <a:avLst/>
+          </a:prstGeom>
+        </p:spPr>
+        <p:txBody>
+          <a:bodyPr/>
+          <a:lstStyle>
+            <a:lvl1pPr algn="l" defTabSz="914400" rtl="0" eaLnBrk="1" latinLnBrk="0" hangingPunct="1">
+              <a:lnSpc>
+                <a:spcPct val="90000"/>
+              </a:lnSpc>
+              <a:spcBef>
+                <a:spcPct val="0"/>
+              </a:spcBef>
+              <a:buNone/>
+              <a:defRPr sz="4400" kern="1200">
+                <a:solidFill>
+                  <a:schemeClr val="tx1"/>
+                </a:solidFill>
+                <a:latin typeface="+mj-lt"/>
+                <a:ea typeface="+mj-ea"/>
+                <a:cs typeface="+mj-cs"/>
+              </a:defRPr>
+            </a:lvl1pPr>
+          </a:lstStyle>
+          <a:p>
+            <a:r>
+              <a:rPr lang="pt-PT" b="1" dirty="0">
+                <a:solidFill>
+                  <a:schemeClr val="bg1"/>
+                </a:solidFill>
+              </a:rPr>
+              <a:t>Arquitetura do Projeto</a:t>
+            </a:r>
+          </a:p>
+        </p:txBody>
+      </p:sp>
+      <p:sp>
+        <p:nvSpPr>
+          <p:cNvPr id="5" name="CaixaDeTexto 4">
+            <a:extLst>
+              <a:ext uri="{FF2B5EF4-FFF2-40B4-BE49-F238E27FC236}">
+                <a16:creationId xmlns:a16="http://schemas.microsoft.com/office/drawing/2014/main" id="{7E34B5BB-688D-9D36-EC9A-9D4DD840EB34}"/>
+              </a:ext>
+            </a:extLst>
+          </p:cNvPr>
+          <p:cNvSpPr txBox="1"/>
+          <p:nvPr/>
+        </p:nvSpPr>
+        <p:spPr>
+          <a:xfrm>
+            <a:off x="3065155" y="6523945"/>
+            <a:ext cx="6061689" cy="276999"/>
+          </a:xfrm>
+          <a:prstGeom prst="rect">
+            <a:avLst/>
+          </a:prstGeom>
+          <a:noFill/>
+        </p:spPr>
+        <p:txBody>
+          <a:bodyPr wrap="square" rtlCol="0">
+            <a:spAutoFit/>
+          </a:bodyPr>
+          <a:lstStyle/>
+          <a:p>
+            <a:pPr algn="ctr"/>
+            <a:r>
+              <a:rPr lang="pt-PT" sz="1200" dirty="0">
+                <a:solidFill>
+                  <a:schemeClr val="bg1"/>
+                </a:solidFill>
+              </a:rPr>
+              <a:t>Licenciatura em Engenharia Informática e Multimédia</a:t>
+            </a:r>
+          </a:p>
+        </p:txBody>
+      </p:sp>
+      <p:pic>
+        <p:nvPicPr>
+          <p:cNvPr id="6" name="Picture 2" descr="Serviço de Comunicação e Imagem | Instituto Superior de Engenharia de Lisboa">
+            <a:extLst>
+              <a:ext uri="{FF2B5EF4-FFF2-40B4-BE49-F238E27FC236}">
+                <a16:creationId xmlns:a16="http://schemas.microsoft.com/office/drawing/2014/main" id="{967DB7D6-3123-E224-8C63-A8D894035F85}"/>
+              </a:ext>
+            </a:extLst>
+          </p:cNvPr>
+          <p:cNvPicPr>
+            <a:picLocks noChangeAspect="1" noChangeArrowheads="1"/>
+          </p:cNvPicPr>
+          <p:nvPr/>
+        </p:nvPicPr>
+        <p:blipFill>
+          <a:blip r:embed="rId2">
+            <a:duotone>
+              <a:schemeClr val="accent4">
+                <a:shade val="45000"/>
+                <a:satMod val="135000"/>
+              </a:schemeClr>
+              <a:prstClr val="white"/>
+            </a:duotone>
+            <a:extLst>
+              <a:ext uri="{BEBA8EAE-BF5A-486C-A8C5-ECC9F3942E4B}">
+                <a14:imgProps xmlns:a14="http://schemas.microsoft.com/office/drawing/2010/main">
+                  <a14:imgLayer r:embed="rId3">
+                    <a14:imgEffect>
+                      <a14:colorTemperature colorTemp="5212"/>
+                    </a14:imgEffect>
+                    <a14:imgEffect>
+                      <a14:saturation sat="153000"/>
+                    </a14:imgEffect>
+                  </a14:imgLayer>
+                </a14:imgProps>
+              </a:ext>
+              <a:ext uri="{28A0092B-C50C-407E-A947-70E740481C1C}">
+                <a14:useLocalDpi xmlns:a14="http://schemas.microsoft.com/office/drawing/2010/main" val="0"/>
+              </a:ext>
+            </a:extLst>
+          </a:blip>
+          <a:srcRect/>
+          <a:stretch>
+            <a:fillRect/>
+          </a:stretch>
+        </p:blipFill>
+        <p:spPr bwMode="auto">
+          <a:xfrm>
+            <a:off x="8892438" y="5663355"/>
+            <a:ext cx="3634141" cy="1370847"/>
+          </a:xfrm>
+          <a:prstGeom prst="rect">
+            <a:avLst/>
+          </a:prstGeom>
+          <a:noFill/>
+          <a:extLst>
+            <a:ext uri="{909E8E84-426E-40DD-AFC4-6F175D3DCCD1}">
+              <a14:hiddenFill xmlns:a14="http://schemas.microsoft.com/office/drawing/2010/main">
+                <a:solidFill>
+                  <a:srgbClr val="FFFFFF"/>
+                </a:solidFill>
+              </a14:hiddenFill>
+            </a:ext>
+          </a:extLst>
+        </p:spPr>
+      </p:pic>
+      <p:sp>
+        <p:nvSpPr>
+          <p:cNvPr id="4" name="Marcador de Posição do Número do Diapositivo 4">
+            <a:extLst>
+              <a:ext uri="{FF2B5EF4-FFF2-40B4-BE49-F238E27FC236}">
+                <a16:creationId xmlns:a16="http://schemas.microsoft.com/office/drawing/2014/main" id="{F62348EE-D1E5-4711-FEAB-AF9C1EFA2C07}"/>
+              </a:ext>
+            </a:extLst>
+          </p:cNvPr>
+          <p:cNvSpPr>
+            <a:spLocks noGrp="1"/>
+          </p:cNvSpPr>
+          <p:nvPr>
+            <p:ph type="sldNum" sz="quarter" idx="12"/>
+          </p:nvPr>
+        </p:nvSpPr>
+        <p:spPr>
+          <a:xfrm>
+            <a:off x="567554" y="6341382"/>
+            <a:ext cx="256311" cy="365125"/>
+          </a:xfrm>
+        </p:spPr>
+        <p:txBody>
+          <a:bodyPr/>
+          <a:lstStyle/>
+          <a:p>
+            <a:fld id="{AEFA9852-3563-417D-95EE-A70EE092CCC6}" type="slidenum">
+              <a:rPr lang="pt-PT" sz="1600" b="1" smtClean="0">
+                <a:solidFill>
+                  <a:schemeClr val="bg1"/>
+                </a:solidFill>
+              </a:rPr>
+              <a:t>6</a:t>
+            </a:fld>
+            <a:endParaRPr lang="pt-PT" b="1" dirty="0">
+              <a:solidFill>
+                <a:schemeClr val="bg1"/>
+              </a:solidFill>
+            </a:endParaRPr>
+          </a:p>
+        </p:txBody>
+      </p:sp>
+      <p:pic>
+        <p:nvPicPr>
+          <p:cNvPr id="12" name="Imagem 11">
+            <a:extLst>
+              <a:ext uri="{FF2B5EF4-FFF2-40B4-BE49-F238E27FC236}">
+                <a16:creationId xmlns:a16="http://schemas.microsoft.com/office/drawing/2014/main" id="{8464B663-0310-5C6D-A760-0C6921A87144}"/>
+              </a:ext>
+            </a:extLst>
+          </p:cNvPr>
+          <p:cNvPicPr>
+            <a:picLocks noChangeAspect="1"/>
+          </p:cNvPicPr>
+          <p:nvPr/>
+        </p:nvPicPr>
+        <p:blipFill>
+          <a:blip r:embed="rId4"/>
+          <a:stretch>
+            <a:fillRect/>
+          </a:stretch>
+        </p:blipFill>
+        <p:spPr>
+          <a:xfrm>
+            <a:off x="1209673" y="2457450"/>
+            <a:ext cx="9772650" cy="1943100"/>
+          </a:xfrm>
+          <a:prstGeom prst="rect">
+            <a:avLst/>
+          </a:prstGeom>
+        </p:spPr>
+      </p:pic>
+    </p:spTree>
+    <p:extLst>
+      <p:ext uri="{BB962C8B-B14F-4D97-AF65-F5344CB8AC3E}">
+        <p14:creationId xmlns:p14="http://schemas.microsoft.com/office/powerpoint/2010/main" val="732351356"/>
+      </p:ext>
+    </p:extLst>
+  </p:cSld>
+  <p:clrMapOvr>
+    <a:masterClrMapping/>
+  </p:clrMapOvr>
+</p:sld>
+</file>
+
+<file path=ppt/slides/slide7.xml><?xml version="1.0" encoding="utf-8"?>
+<p:sld xmlns:a="http://schemas.openxmlformats.org/drawingml/2006/main" xmlns:r="http://schemas.openxmlformats.org/officeDocument/2006/relationships" xmlns:p="http://schemas.openxmlformats.org/presentationml/2006/main">
+  <p:cSld>
+    <p:bg>
+      <p:bgPr>
+        <a:solidFill>
+          <a:srgbClr val="3D353F"/>
+        </a:solidFill>
+        <a:effectLst/>
+      </p:bgPr>
+    </p:bg>
+    <p:spTree>
+      <p:nvGrpSpPr>
+        <p:cNvPr id="1" name="">
+          <a:extLst>
+            <a:ext uri="{FF2B5EF4-FFF2-40B4-BE49-F238E27FC236}">
+              <a16:creationId xmlns:a16="http://schemas.microsoft.com/office/drawing/2014/main" id="{97CE3E7C-A20D-F8BB-742D-038FF5FD1B39}"/>
+            </a:ext>
+          </a:extLst>
+        </p:cNvPr>
+        <p:cNvGrpSpPr/>
+        <p:nvPr/>
+      </p:nvGrpSpPr>
+      <p:grpSpPr>
+        <a:xfrm>
+          <a:off x="0" y="0"/>
+          <a:ext cx="0" cy="0"/>
+          <a:chOff x="0" y="0"/>
+          <a:chExt cx="0" cy="0"/>
+        </a:xfrm>
+      </p:grpSpPr>
+      <p:sp>
+        <p:nvSpPr>
+          <p:cNvPr id="11" name="Título 1">
+            <a:extLst>
+              <a:ext uri="{FF2B5EF4-FFF2-40B4-BE49-F238E27FC236}">
+                <a16:creationId xmlns:a16="http://schemas.microsoft.com/office/drawing/2014/main" id="{07097AC6-4523-E09B-C4AC-23528FF0EAA8}"/>
+              </a:ext>
+            </a:extLst>
+          </p:cNvPr>
+          <p:cNvSpPr txBox="1">
+            <a:spLocks/>
+          </p:cNvSpPr>
+          <p:nvPr/>
+        </p:nvSpPr>
+        <p:spPr>
+          <a:xfrm>
+            <a:off x="838200" y="365125"/>
+            <a:ext cx="10515600" cy="1325563"/>
+          </a:xfrm>
+          <a:prstGeom prst="rect">
+            <a:avLst/>
+          </a:prstGeom>
+        </p:spPr>
+        <p:txBody>
+          <a:bodyPr>
+            <a:normAutofit/>
+          </a:bodyPr>
+          <a:lstStyle>
+            <a:lvl1pPr algn="l" defTabSz="914400" rtl="0" eaLnBrk="1" latinLnBrk="0" hangingPunct="1">
+              <a:lnSpc>
+                <a:spcPct val="90000"/>
+              </a:lnSpc>
+              <a:spcBef>
+                <a:spcPct val="0"/>
+              </a:spcBef>
+              <a:buNone/>
+              <a:defRPr sz="4400" kern="1200">
+                <a:solidFill>
+                  <a:schemeClr val="tx1"/>
+                </a:solidFill>
+                <a:latin typeface="+mj-lt"/>
+                <a:ea typeface="+mj-ea"/>
+                <a:cs typeface="+mj-cs"/>
+              </a:defRPr>
+            </a:lvl1pPr>
+          </a:lstStyle>
+          <a:p>
+            <a:endParaRPr lang="pt-PT" b="1" dirty="0">
+              <a:solidFill>
+                <a:schemeClr val="bg1"/>
+              </a:solidFill>
+            </a:endParaRPr>
+          </a:p>
+        </p:txBody>
+      </p:sp>
+      <p:sp>
+        <p:nvSpPr>
+          <p:cNvPr id="3" name="Título 1">
+            <a:extLst>
+              <a:ext uri="{FF2B5EF4-FFF2-40B4-BE49-F238E27FC236}">
                 <a16:creationId xmlns:a16="http://schemas.microsoft.com/office/drawing/2014/main" id="{FFAB5A42-E3A2-502F-46BD-E858987135E6}"/>
               </a:ext>
             </a:extLst>
@@ -13836,7 +14994,7 @@
                   <a:schemeClr val="bg1"/>
                 </a:solidFill>
               </a:rPr>
-              <a:t>6</a:t>
+              <a:t>7</a:t>
             </a:fld>
             <a:endParaRPr lang="pt-PT" b="1" dirty="0">
               <a:solidFill>
@@ -14842,7 +16000,7 @@
 </p:sld>
 </file>
 
-<file path=ppt/slides/slide7.xml><?xml version="1.0" encoding="utf-8"?>
+<file path=ppt/slides/slide8.xml><?xml version="1.0" encoding="utf-8"?>
 <p:sld xmlns:a="http://schemas.openxmlformats.org/drawingml/2006/main" xmlns:r="http://schemas.openxmlformats.org/officeDocument/2006/relationships" xmlns:p="http://schemas.openxmlformats.org/presentationml/2006/main">
   <p:cSld>
     <p:bg>
@@ -15323,7 +16481,7 @@
                   <a:schemeClr val="bg1"/>
                 </a:solidFill>
               </a:rPr>
-              <a:t>7</a:t>
+              <a:t>8</a:t>
             </a:fld>
             <a:endParaRPr lang="pt-PT" b="1" dirty="0">
               <a:solidFill>
@@ -15335,10 +16493,10 @@
       </p:sp>
       <p:pic>
         <p:nvPicPr>
-          <p:cNvPr id="14" name="Imagem 13">
+          <p:cNvPr id="5" name="Imagem 4">
             <a:extLst>
               <a:ext uri="{FF2B5EF4-FFF2-40B4-BE49-F238E27FC236}">
-                <a16:creationId xmlns:a16="http://schemas.microsoft.com/office/drawing/2014/main" id="{AEAD1A92-95C0-ACD2-30C6-E329212F0C21}"/>
+                <a16:creationId xmlns:a16="http://schemas.microsoft.com/office/drawing/2014/main" id="{B2A33BF0-F03C-D74E-1084-977DECA682EB}"/>
               </a:ext>
             </a:extLst>
           </p:cNvPr>
@@ -15348,37 +16506,19 @@
           <p:nvPr/>
         </p:nvPicPr>
         <p:blipFill>
-          <a:blip r:embed="rId5">
-            <a:alphaModFix/>
-            <a:extLst>
-              <a:ext uri="{28A0092B-C50C-407E-A947-70E740481C1C}">
-                <a14:useLocalDpi xmlns:a14="http://schemas.microsoft.com/office/drawing/2010/main" val="0"/>
-              </a:ext>
-            </a:extLst>
-          </a:blip>
-          <a:srcRect l="3521" t="4146" r="5891" b="3902"/>
+          <a:blip r:embed="rId5"/>
           <a:stretch>
             <a:fillRect/>
           </a:stretch>
         </p:blipFill>
         <p:spPr>
           <a:xfrm>
-            <a:off x="2767091" y="1334942"/>
-            <a:ext cx="6202968" cy="4620545"/>
+            <a:off x="2809874" y="1160825"/>
+            <a:ext cx="6572250" cy="4857750"/>
           </a:xfrm>
           <a:prstGeom prst="rect">
             <a:avLst/>
           </a:prstGeom>
-          <a:ln>
-            <a:noFill/>
-          </a:ln>
-          <a:effectLst>
-            <a:outerShdw blurRad="190500" algn="tl" rotWithShape="0">
-              <a:srgbClr val="000000">
-                <a:alpha val="70000"/>
-              </a:srgbClr>
-            </a:outerShdw>
-          </a:effectLst>
         </p:spPr>
       </p:pic>
     </p:spTree>
@@ -15394,7 +16534,7 @@
 </p:sld>
 </file>
 
-<file path=ppt/slides/slide8.xml><?xml version="1.0" encoding="utf-8"?>
+<file path=ppt/slides/slide9.xml><?xml version="1.0" encoding="utf-8"?>
 <p:sld xmlns:a="http://schemas.openxmlformats.org/drawingml/2006/main" xmlns:r="http://schemas.openxmlformats.org/officeDocument/2006/relationships" xmlns:p="http://schemas.openxmlformats.org/presentationml/2006/main">
   <p:cSld>
     <p:bg>
@@ -15675,7 +16815,7 @@
                   <a:schemeClr val="bg1"/>
                 </a:solidFill>
               </a:rPr>
-              <a:t>8</a:t>
+              <a:t>9</a:t>
             </a:fld>
             <a:endParaRPr lang="pt-PT" b="1" dirty="0">
               <a:solidFill>
@@ -16007,557 +17147,6 @@
     <p:extLst>
       <p:ext uri="{BB962C8B-B14F-4D97-AF65-F5344CB8AC3E}">
         <p14:creationId xmlns:p14="http://schemas.microsoft.com/office/powerpoint/2010/main" val="3249151252"/>
-      </p:ext>
-    </p:extLst>
-  </p:cSld>
-  <p:clrMapOvr>
-    <a:masterClrMapping/>
-  </p:clrMapOvr>
-</p:sld>
-</file>
-
-<file path=ppt/slides/slide9.xml><?xml version="1.0" encoding="utf-8"?>
-<p:sld xmlns:a="http://schemas.openxmlformats.org/drawingml/2006/main" xmlns:r="http://schemas.openxmlformats.org/officeDocument/2006/relationships" xmlns:p="http://schemas.openxmlformats.org/presentationml/2006/main">
-  <p:cSld>
-    <p:bg>
-      <p:bgPr>
-        <a:solidFill>
-          <a:srgbClr val="3D353F"/>
-        </a:solidFill>
-        <a:effectLst/>
-      </p:bgPr>
-    </p:bg>
-    <p:spTree>
-      <p:nvGrpSpPr>
-        <p:cNvPr id="1" name="">
-          <a:extLst>
-            <a:ext uri="{FF2B5EF4-FFF2-40B4-BE49-F238E27FC236}">
-              <a16:creationId xmlns:a16="http://schemas.microsoft.com/office/drawing/2014/main" id="{B7216570-ACC7-3D94-FCFB-19C36E2A468D}"/>
-            </a:ext>
-          </a:extLst>
-        </p:cNvPr>
-        <p:cNvGrpSpPr/>
-        <p:nvPr/>
-      </p:nvGrpSpPr>
-      <p:grpSpPr>
-        <a:xfrm>
-          <a:off x="0" y="0"/>
-          <a:ext cx="0" cy="0"/>
-          <a:chOff x="0" y="0"/>
-          <a:chExt cx="0" cy="0"/>
-        </a:xfrm>
-      </p:grpSpPr>
-      <p:sp>
-        <p:nvSpPr>
-          <p:cNvPr id="10" name="Marcador de Posição de Conteúdo 2">
-            <a:extLst>
-              <a:ext uri="{FF2B5EF4-FFF2-40B4-BE49-F238E27FC236}">
-                <a16:creationId xmlns:a16="http://schemas.microsoft.com/office/drawing/2014/main" id="{00245E8A-6563-A31F-4920-D66F3794D4B1}"/>
-              </a:ext>
-            </a:extLst>
-          </p:cNvPr>
-          <p:cNvSpPr txBox="1">
-            <a:spLocks/>
-          </p:cNvSpPr>
-          <p:nvPr/>
-        </p:nvSpPr>
-        <p:spPr>
-          <a:xfrm>
-            <a:off x="838200" y="1825625"/>
-            <a:ext cx="10515600" cy="4351338"/>
-          </a:xfrm>
-          <a:prstGeom prst="rect">
-            <a:avLst/>
-          </a:prstGeom>
-        </p:spPr>
-        <p:txBody>
-          <a:bodyPr/>
-          <a:lstStyle>
-            <a:lvl1pPr marL="228600" indent="-228600" algn="l" defTabSz="914400" rtl="0" eaLnBrk="1" latinLnBrk="0" hangingPunct="1">
-              <a:lnSpc>
-                <a:spcPct val="90000"/>
-              </a:lnSpc>
-              <a:spcBef>
-                <a:spcPts val="1000"/>
-              </a:spcBef>
-              <a:buFont typeface="Arial" panose="020B0604020202020204" pitchFamily="34" charset="0"/>
-              <a:buChar char="•"/>
-              <a:defRPr sz="2800" kern="1200">
-                <a:solidFill>
-                  <a:schemeClr val="tx1"/>
-                </a:solidFill>
-                <a:latin typeface="+mn-lt"/>
-                <a:ea typeface="+mn-ea"/>
-                <a:cs typeface="+mn-cs"/>
-              </a:defRPr>
-            </a:lvl1pPr>
-            <a:lvl2pPr marL="685800" indent="-228600" algn="l" defTabSz="914400" rtl="0" eaLnBrk="1" latinLnBrk="0" hangingPunct="1">
-              <a:lnSpc>
-                <a:spcPct val="90000"/>
-              </a:lnSpc>
-              <a:spcBef>
-                <a:spcPts val="500"/>
-              </a:spcBef>
-              <a:buFont typeface="Arial" panose="020B0604020202020204" pitchFamily="34" charset="0"/>
-              <a:buChar char="•"/>
-              <a:defRPr sz="2400" kern="1200">
-                <a:solidFill>
-                  <a:schemeClr val="tx1"/>
-                </a:solidFill>
-                <a:latin typeface="+mn-lt"/>
-                <a:ea typeface="+mn-ea"/>
-                <a:cs typeface="+mn-cs"/>
-              </a:defRPr>
-            </a:lvl2pPr>
-            <a:lvl3pPr marL="1143000" indent="-228600" algn="l" defTabSz="914400" rtl="0" eaLnBrk="1" latinLnBrk="0" hangingPunct="1">
-              <a:lnSpc>
-                <a:spcPct val="90000"/>
-              </a:lnSpc>
-              <a:spcBef>
-                <a:spcPts val="500"/>
-              </a:spcBef>
-              <a:buFont typeface="Arial" panose="020B0604020202020204" pitchFamily="34" charset="0"/>
-              <a:buChar char="•"/>
-              <a:defRPr sz="2000" kern="1200">
-                <a:solidFill>
-                  <a:schemeClr val="tx1"/>
-                </a:solidFill>
-                <a:latin typeface="+mn-lt"/>
-                <a:ea typeface="+mn-ea"/>
-                <a:cs typeface="+mn-cs"/>
-              </a:defRPr>
-            </a:lvl3pPr>
-            <a:lvl4pPr marL="1600200" indent="-228600" algn="l" defTabSz="914400" rtl="0" eaLnBrk="1" latinLnBrk="0" hangingPunct="1">
-              <a:lnSpc>
-                <a:spcPct val="90000"/>
-              </a:lnSpc>
-              <a:spcBef>
-                <a:spcPts val="500"/>
-              </a:spcBef>
-              <a:buFont typeface="Arial" panose="020B0604020202020204" pitchFamily="34" charset="0"/>
-              <a:buChar char="•"/>
-              <a:defRPr sz="1800" kern="1200">
-                <a:solidFill>
-                  <a:schemeClr val="tx1"/>
-                </a:solidFill>
-                <a:latin typeface="+mn-lt"/>
-                <a:ea typeface="+mn-ea"/>
-                <a:cs typeface="+mn-cs"/>
-              </a:defRPr>
-            </a:lvl4pPr>
-            <a:lvl5pPr marL="2057400" indent="-228600" algn="l" defTabSz="914400" rtl="0" eaLnBrk="1" latinLnBrk="0" hangingPunct="1">
-              <a:lnSpc>
-                <a:spcPct val="90000"/>
-              </a:lnSpc>
-              <a:spcBef>
-                <a:spcPts val="500"/>
-              </a:spcBef>
-              <a:buFont typeface="Arial" panose="020B0604020202020204" pitchFamily="34" charset="0"/>
-              <a:buChar char="•"/>
-              <a:defRPr sz="1800" kern="1200">
-                <a:solidFill>
-                  <a:schemeClr val="tx1"/>
-                </a:solidFill>
-                <a:latin typeface="+mn-lt"/>
-                <a:ea typeface="+mn-ea"/>
-                <a:cs typeface="+mn-cs"/>
-              </a:defRPr>
-            </a:lvl5pPr>
-            <a:lvl6pPr marL="2514600" indent="-228600" algn="l" defTabSz="914400" rtl="0" eaLnBrk="1" latinLnBrk="0" hangingPunct="1">
-              <a:lnSpc>
-                <a:spcPct val="90000"/>
-              </a:lnSpc>
-              <a:spcBef>
-                <a:spcPts val="500"/>
-              </a:spcBef>
-              <a:buFont typeface="Arial" panose="020B0604020202020204" pitchFamily="34" charset="0"/>
-              <a:buChar char="•"/>
-              <a:defRPr sz="1800" kern="1200">
-                <a:solidFill>
-                  <a:schemeClr val="tx1"/>
-                </a:solidFill>
-                <a:latin typeface="+mn-lt"/>
-                <a:ea typeface="+mn-ea"/>
-                <a:cs typeface="+mn-cs"/>
-              </a:defRPr>
-            </a:lvl6pPr>
-            <a:lvl7pPr marL="2971800" indent="-228600" algn="l" defTabSz="914400" rtl="0" eaLnBrk="1" latinLnBrk="0" hangingPunct="1">
-              <a:lnSpc>
-                <a:spcPct val="90000"/>
-              </a:lnSpc>
-              <a:spcBef>
-                <a:spcPts val="500"/>
-              </a:spcBef>
-              <a:buFont typeface="Arial" panose="020B0604020202020204" pitchFamily="34" charset="0"/>
-              <a:buChar char="•"/>
-              <a:defRPr sz="1800" kern="1200">
-                <a:solidFill>
-                  <a:schemeClr val="tx1"/>
-                </a:solidFill>
-                <a:latin typeface="+mn-lt"/>
-                <a:ea typeface="+mn-ea"/>
-                <a:cs typeface="+mn-cs"/>
-              </a:defRPr>
-            </a:lvl7pPr>
-            <a:lvl8pPr marL="3429000" indent="-228600" algn="l" defTabSz="914400" rtl="0" eaLnBrk="1" latinLnBrk="0" hangingPunct="1">
-              <a:lnSpc>
-                <a:spcPct val="90000"/>
-              </a:lnSpc>
-              <a:spcBef>
-                <a:spcPts val="500"/>
-              </a:spcBef>
-              <a:buFont typeface="Arial" panose="020B0604020202020204" pitchFamily="34" charset="0"/>
-              <a:buChar char="•"/>
-              <a:defRPr sz="1800" kern="1200">
-                <a:solidFill>
-                  <a:schemeClr val="tx1"/>
-                </a:solidFill>
-                <a:latin typeface="+mn-lt"/>
-                <a:ea typeface="+mn-ea"/>
-                <a:cs typeface="+mn-cs"/>
-              </a:defRPr>
-            </a:lvl8pPr>
-            <a:lvl9pPr marL="3886200" indent="-228600" algn="l" defTabSz="914400" rtl="0" eaLnBrk="1" latinLnBrk="0" hangingPunct="1">
-              <a:lnSpc>
-                <a:spcPct val="90000"/>
-              </a:lnSpc>
-              <a:spcBef>
-                <a:spcPts val="500"/>
-              </a:spcBef>
-              <a:buFont typeface="Arial" panose="020B0604020202020204" pitchFamily="34" charset="0"/>
-              <a:buChar char="•"/>
-              <a:defRPr sz="1800" kern="1200">
-                <a:solidFill>
-                  <a:schemeClr val="tx1"/>
-                </a:solidFill>
-                <a:latin typeface="+mn-lt"/>
-                <a:ea typeface="+mn-ea"/>
-                <a:cs typeface="+mn-cs"/>
-              </a:defRPr>
-            </a:lvl9pPr>
-          </a:lstStyle>
-          <a:p>
-            <a:pPr marL="0" indent="0">
-              <a:buNone/>
-            </a:pPr>
-            <a:endParaRPr lang="pt-PT" dirty="0">
-              <a:solidFill>
-                <a:schemeClr val="bg1"/>
-              </a:solidFill>
-            </a:endParaRPr>
-          </a:p>
-        </p:txBody>
-      </p:sp>
-      <p:sp>
-        <p:nvSpPr>
-          <p:cNvPr id="11" name="Título 1">
-            <a:extLst>
-              <a:ext uri="{FF2B5EF4-FFF2-40B4-BE49-F238E27FC236}">
-                <a16:creationId xmlns:a16="http://schemas.microsoft.com/office/drawing/2014/main" id="{5B2B5E58-7758-F935-07AC-17DF9A32F291}"/>
-              </a:ext>
-            </a:extLst>
-          </p:cNvPr>
-          <p:cNvSpPr txBox="1">
-            <a:spLocks/>
-          </p:cNvSpPr>
-          <p:nvPr/>
-        </p:nvSpPr>
-        <p:spPr>
-          <a:xfrm>
-            <a:off x="838200" y="365125"/>
-            <a:ext cx="10515600" cy="1325563"/>
-          </a:xfrm>
-          <a:prstGeom prst="rect">
-            <a:avLst/>
-          </a:prstGeom>
-        </p:spPr>
-        <p:txBody>
-          <a:bodyPr>
-            <a:normAutofit/>
-          </a:bodyPr>
-          <a:lstStyle>
-            <a:lvl1pPr algn="l" defTabSz="914400" rtl="0" eaLnBrk="1" latinLnBrk="0" hangingPunct="1">
-              <a:lnSpc>
-                <a:spcPct val="90000"/>
-              </a:lnSpc>
-              <a:spcBef>
-                <a:spcPct val="0"/>
-              </a:spcBef>
-              <a:buNone/>
-              <a:defRPr sz="4400" kern="1200">
-                <a:solidFill>
-                  <a:schemeClr val="tx1"/>
-                </a:solidFill>
-                <a:latin typeface="+mj-lt"/>
-                <a:ea typeface="+mj-ea"/>
-                <a:cs typeface="+mj-cs"/>
-              </a:defRPr>
-            </a:lvl1pPr>
-          </a:lstStyle>
-          <a:p>
-            <a:endParaRPr lang="pt-PT" b="1" dirty="0">
-              <a:solidFill>
-                <a:schemeClr val="bg1"/>
-              </a:solidFill>
-            </a:endParaRPr>
-          </a:p>
-        </p:txBody>
-      </p:sp>
-      <p:sp>
-        <p:nvSpPr>
-          <p:cNvPr id="3" name="Título 1">
-            <a:extLst>
-              <a:ext uri="{FF2B5EF4-FFF2-40B4-BE49-F238E27FC236}">
-                <a16:creationId xmlns:a16="http://schemas.microsoft.com/office/drawing/2014/main" id="{4B09E4AD-F3BE-4CCD-5D80-9E26321808C8}"/>
-              </a:ext>
-            </a:extLst>
-          </p:cNvPr>
-          <p:cNvSpPr txBox="1">
-            <a:spLocks/>
-          </p:cNvSpPr>
-          <p:nvPr/>
-        </p:nvSpPr>
-        <p:spPr>
-          <a:xfrm>
-            <a:off x="2763203" y="676852"/>
-            <a:ext cx="6781046" cy="709306"/>
-          </a:xfrm>
-          <a:prstGeom prst="rect">
-            <a:avLst/>
-          </a:prstGeom>
-        </p:spPr>
-        <p:txBody>
-          <a:bodyPr/>
-          <a:lstStyle>
-            <a:lvl1pPr algn="l" defTabSz="914400" rtl="0" eaLnBrk="1" latinLnBrk="0" hangingPunct="1">
-              <a:lnSpc>
-                <a:spcPct val="90000"/>
-              </a:lnSpc>
-              <a:spcBef>
-                <a:spcPct val="0"/>
-              </a:spcBef>
-              <a:buNone/>
-              <a:defRPr sz="4400" kern="1200">
-                <a:solidFill>
-                  <a:schemeClr val="tx1"/>
-                </a:solidFill>
-                <a:latin typeface="+mj-lt"/>
-                <a:ea typeface="+mj-ea"/>
-                <a:cs typeface="+mj-cs"/>
-              </a:defRPr>
-            </a:lvl1pPr>
-          </a:lstStyle>
-          <a:p>
-            <a:pPr algn="ctr"/>
-            <a:r>
-              <a:rPr lang="pt-PT" b="1" dirty="0">
-                <a:solidFill>
-                  <a:schemeClr val="bg1"/>
-                </a:solidFill>
-              </a:rPr>
-              <a:t>Caso de utilização principal</a:t>
-            </a:r>
-          </a:p>
-        </p:txBody>
-      </p:sp>
-      <p:sp>
-        <p:nvSpPr>
-          <p:cNvPr id="9" name="CaixaDeTexto 8">
-            <a:extLst>
-              <a:ext uri="{FF2B5EF4-FFF2-40B4-BE49-F238E27FC236}">
-                <a16:creationId xmlns:a16="http://schemas.microsoft.com/office/drawing/2014/main" id="{4F2E88C9-1D24-9A91-04D4-82390956B637}"/>
-              </a:ext>
-            </a:extLst>
-          </p:cNvPr>
-          <p:cNvSpPr txBox="1"/>
-          <p:nvPr/>
-        </p:nvSpPr>
-        <p:spPr>
-          <a:xfrm>
-            <a:off x="3065155" y="6523945"/>
-            <a:ext cx="6061689" cy="276999"/>
-          </a:xfrm>
-          <a:prstGeom prst="rect">
-            <a:avLst/>
-          </a:prstGeom>
-          <a:noFill/>
-        </p:spPr>
-        <p:txBody>
-          <a:bodyPr wrap="square" rtlCol="0">
-            <a:spAutoFit/>
-          </a:bodyPr>
-          <a:lstStyle/>
-          <a:p>
-            <a:pPr algn="ctr"/>
-            <a:r>
-              <a:rPr lang="pt-PT" sz="1200" dirty="0">
-                <a:solidFill>
-                  <a:schemeClr val="bg1"/>
-                </a:solidFill>
-              </a:rPr>
-              <a:t>Licenciatura em Engenharia Informática e Multimédia</a:t>
-            </a:r>
-          </a:p>
-        </p:txBody>
-      </p:sp>
-      <p:pic>
-        <p:nvPicPr>
-          <p:cNvPr id="12" name="Picture 2" descr="Serviço de Comunicação e Imagem | Instituto Superior de Engenharia de Lisboa">
-            <a:extLst>
-              <a:ext uri="{FF2B5EF4-FFF2-40B4-BE49-F238E27FC236}">
-                <a16:creationId xmlns:a16="http://schemas.microsoft.com/office/drawing/2014/main" id="{E45B079B-1E64-39A4-517B-20AA744B3F31}"/>
-              </a:ext>
-            </a:extLst>
-          </p:cNvPr>
-          <p:cNvPicPr>
-            <a:picLocks noChangeAspect="1" noChangeArrowheads="1"/>
-          </p:cNvPicPr>
-          <p:nvPr/>
-        </p:nvPicPr>
-        <p:blipFill>
-          <a:blip r:embed="rId3">
-            <a:duotone>
-              <a:schemeClr val="accent4">
-                <a:shade val="45000"/>
-                <a:satMod val="135000"/>
-              </a:schemeClr>
-              <a:prstClr val="white"/>
-            </a:duotone>
-            <a:extLst>
-              <a:ext uri="{BEBA8EAE-BF5A-486C-A8C5-ECC9F3942E4B}">
-                <a14:imgProps xmlns:a14="http://schemas.microsoft.com/office/drawing/2010/main">
-                  <a14:imgLayer r:embed="rId4">
-                    <a14:imgEffect>
-                      <a14:colorTemperature colorTemp="5212"/>
-                    </a14:imgEffect>
-                    <a14:imgEffect>
-                      <a14:saturation sat="153000"/>
-                    </a14:imgEffect>
-                  </a14:imgLayer>
-                </a14:imgProps>
-              </a:ext>
-              <a:ext uri="{28A0092B-C50C-407E-A947-70E740481C1C}">
-                <a14:useLocalDpi xmlns:a14="http://schemas.microsoft.com/office/drawing/2010/main" val="0"/>
-              </a:ext>
-            </a:extLst>
-          </a:blip>
-          <a:srcRect/>
-          <a:stretch>
-            <a:fillRect/>
-          </a:stretch>
-        </p:blipFill>
-        <p:spPr bwMode="auto">
-          <a:xfrm>
-            <a:off x="8892438" y="5663355"/>
-            <a:ext cx="3634141" cy="1370847"/>
-          </a:xfrm>
-          <a:prstGeom prst="rect">
-            <a:avLst/>
-          </a:prstGeom>
-          <a:noFill/>
-          <a:extLst>
-            <a:ext uri="{909E8E84-426E-40DD-AFC4-6F175D3DCCD1}">
-              <a14:hiddenFill xmlns:a14="http://schemas.microsoft.com/office/drawing/2010/main">
-                <a:solidFill>
-                  <a:srgbClr val="FFFFFF"/>
-                </a:solidFill>
-              </a14:hiddenFill>
-            </a:ext>
-          </a:extLst>
-        </p:spPr>
-      </p:pic>
-      <p:sp>
-        <p:nvSpPr>
-          <p:cNvPr id="4" name="Marcador de Posição do Número do Diapositivo 4">
-            <a:extLst>
-              <a:ext uri="{FF2B5EF4-FFF2-40B4-BE49-F238E27FC236}">
-                <a16:creationId xmlns:a16="http://schemas.microsoft.com/office/drawing/2014/main" id="{14E0DA14-B4AB-73CF-9AB5-B207054E0F54}"/>
-              </a:ext>
-            </a:extLst>
-          </p:cNvPr>
-          <p:cNvSpPr>
-            <a:spLocks noGrp="1"/>
-          </p:cNvSpPr>
-          <p:nvPr>
-            <p:ph type="sldNum" sz="quarter" idx="12"/>
-          </p:nvPr>
-        </p:nvSpPr>
-        <p:spPr>
-          <a:xfrm>
-            <a:off x="567554" y="6341382"/>
-            <a:ext cx="423046" cy="365125"/>
-          </a:xfrm>
-        </p:spPr>
-        <p:txBody>
-          <a:bodyPr/>
-          <a:lstStyle/>
-          <a:p>
-            <a:fld id="{AEFA9852-3563-417D-95EE-A70EE092CCC6}" type="slidenum">
-              <a:rPr lang="pt-PT" sz="1600" b="1" smtClean="0">
-                <a:solidFill>
-                  <a:schemeClr val="bg1"/>
-                </a:solidFill>
-              </a:rPr>
-              <a:t>9</a:t>
-            </a:fld>
-            <a:endParaRPr lang="pt-PT" b="1" dirty="0">
-              <a:solidFill>
-                <a:schemeClr val="bg1"/>
-              </a:solidFill>
-            </a:endParaRPr>
-          </a:p>
-        </p:txBody>
-      </p:sp>
-      <p:pic>
-        <p:nvPicPr>
-          <p:cNvPr id="8" name="Imagem 7">
-            <a:extLst>
-              <a:ext uri="{FF2B5EF4-FFF2-40B4-BE49-F238E27FC236}">
-                <a16:creationId xmlns:a16="http://schemas.microsoft.com/office/drawing/2014/main" id="{9851AD86-8766-F467-660C-39FDEA521374}"/>
-              </a:ext>
-            </a:extLst>
-          </p:cNvPr>
-          <p:cNvPicPr>
-            <a:picLocks noChangeAspect="1"/>
-          </p:cNvPicPr>
-          <p:nvPr/>
-        </p:nvPicPr>
-        <p:blipFill>
-          <a:blip r:embed="rId5">
-            <a:extLst>
-              <a:ext uri="{28A0092B-C50C-407E-A947-70E740481C1C}">
-                <a14:useLocalDpi xmlns:a14="http://schemas.microsoft.com/office/drawing/2010/main" val="0"/>
-              </a:ext>
-            </a:extLst>
-          </a:blip>
-          <a:stretch>
-            <a:fillRect/>
-          </a:stretch>
-        </p:blipFill>
-        <p:spPr>
-          <a:xfrm>
-            <a:off x="572655" y="2135414"/>
-            <a:ext cx="11167008" cy="2601460"/>
-          </a:xfrm>
-          <a:prstGeom prst="rect">
-            <a:avLst/>
-          </a:prstGeom>
-          <a:ln>
-            <a:noFill/>
-          </a:ln>
-          <a:effectLst>
-            <a:outerShdw blurRad="190500" algn="tl" rotWithShape="0">
-              <a:srgbClr val="000000">
-                <a:alpha val="70000"/>
-              </a:srgbClr>
-            </a:outerShdw>
-          </a:effectLst>
-        </p:spPr>
-      </p:pic>
-    </p:spTree>
-    <p:extLst>
-      <p:ext uri="{BB962C8B-B14F-4D97-AF65-F5344CB8AC3E}">
-        <p14:creationId xmlns:p14="http://schemas.microsoft.com/office/powerpoint/2010/main" val="3120748460"/>
       </p:ext>
     </p:extLst>
   </p:cSld>
